--- a/preview_v7/cn/l-cn-bx-u6-2.pptx
+++ b/preview_v7/cn/l-cn-bx-u6-2.pptx
@@ -3111,7 +3111,7 @@
             <a:avLst/>
           </a:prstGeom>
           <a:solidFill>
-            <a:srgbClr val="F4EFE6"/>
+            <a:srgbClr val="1C2A33"/>
           </a:solidFill>
           <a:ln>
             <a:noFill/>
@@ -3142,177 +3142,14 @@
       </p:sp>
       <p:sp>
         <p:nvSpPr>
-          <p:cNvPr id="3" name="TextBox 2"/>
-          <p:cNvSpPr txBox="1"/>
-          <p:nvPr/>
-        </p:nvSpPr>
-        <p:spPr>
-          <a:xfrm>
-            <a:off x="640080" y="640080"/>
-            <a:ext cx="10911535" cy="502920"/>
-          </a:xfrm>
-          <a:prstGeom prst="rect">
-            <a:avLst/>
-          </a:prstGeom>
-          <a:noFill/>
-        </p:spPr>
-        <p:txBody>
-          <a:bodyPr wrap="square" anchor="t" lIns="0" rIns="0" tIns="0" bIns="0">
-            <a:spAutoFit/>
-          </a:bodyPr>
-          <a:lstStyle/>
-          <a:p>
-            <a:pPr algn="l">
-              <a:spcAft>
-                <a:spcPts val="0"/>
-              </a:spcAft>
-            </a:pPr>
-            <a:r>
-              <a:rPr sz="1200" b="1">
-                <a:solidFill>
-                  <a:srgbClr val="B23A2A"/>
-                </a:solidFill>
-                <a:latin typeface="微软雅黑"/>
-                <a:ea typeface="微软雅黑"/>
-                <a:cs typeface="微软雅黑"/>
-              </a:rPr>
-              <a:t>语文 · 必修下册 · 第6单元 文学阅读与写作（小说）</a:t>
-            </a:r>
-          </a:p>
-        </p:txBody>
-      </p:sp>
-      <p:sp>
-        <p:nvSpPr>
-          <p:cNvPr id="4" name="Rectangle 3"/>
+          <p:cNvPr id="3" name="Rectangle 2"/>
           <p:cNvSpPr/>
           <p:nvPr/>
         </p:nvSpPr>
         <p:spPr>
           <a:xfrm>
-            <a:off x="640080" y="1207008"/>
-            <a:ext cx="822960" cy="30480"/>
-          </a:xfrm>
-          <a:prstGeom prst="rect">
-            <a:avLst/>
-          </a:prstGeom>
-          <a:solidFill>
-            <a:srgbClr val="B23A2A"/>
-          </a:solidFill>
-          <a:ln>
-            <a:noFill/>
-          </a:ln>
-          <a:effectLst/>
-        </p:spPr>
-        <p:style>
-          <a:lnRef idx="1">
-            <a:schemeClr val="accent1"/>
-          </a:lnRef>
-          <a:fillRef idx="3">
-            <a:schemeClr val="accent1"/>
-          </a:fillRef>
-          <a:effectRef idx="2">
-            <a:schemeClr val="accent1"/>
-          </a:effectRef>
-          <a:fontRef idx="minor">
-            <a:schemeClr val="lt1"/>
-          </a:fontRef>
-        </p:style>
-        <p:txBody>
-          <a:bodyPr rtlCol="0" anchor="ctr"/>
-          <a:lstStyle/>
-          <a:p>
-            <a:pPr algn="ctr"/>
-          </a:p>
-        </p:txBody>
-      </p:sp>
-      <p:sp>
-        <p:nvSpPr>
-          <p:cNvPr id="5" name="TextBox 4"/>
-          <p:cNvSpPr txBox="1"/>
-          <p:nvPr/>
-        </p:nvSpPr>
-        <p:spPr>
-          <a:xfrm>
-            <a:off x="640080" y="1737360"/>
-            <a:ext cx="10911535" cy="2011680"/>
-          </a:xfrm>
-          <a:prstGeom prst="rect">
-            <a:avLst/>
-          </a:prstGeom>
-          <a:noFill/>
-        </p:spPr>
-        <p:txBody>
-          <a:bodyPr wrap="square" anchor="t" lIns="0" rIns="0" tIns="0" bIns="0">
-            <a:spAutoFit/>
-          </a:bodyPr>
-          <a:lstStyle/>
-          <a:p>
-            <a:pPr algn="l">
-              <a:lnSpc>
-                <a:spcPct val="115000"/>
-              </a:lnSpc>
-            </a:pPr>
-            <a:r>
-              <a:rPr sz="4000" b="1">
-                <a:solidFill>
-                  <a:srgbClr val="1C2A33"/>
-                </a:solidFill>
-                <a:latin typeface="楷体"/>
-                <a:ea typeface="楷体"/>
-                <a:cs typeface="楷体"/>
-              </a:rPr>
-              <a:t>林教头风雪山神庙 精读——性格转变与环境推动</a:t>
-            </a:r>
-          </a:p>
-        </p:txBody>
-      </p:sp>
-      <p:sp>
-        <p:nvSpPr>
-          <p:cNvPr id="6" name="TextBox 5"/>
-          <p:cNvSpPr txBox="1"/>
-          <p:nvPr/>
-        </p:nvSpPr>
-        <p:spPr>
-          <a:xfrm>
-            <a:off x="640080" y="3840480"/>
-            <a:ext cx="10911535" cy="457200"/>
-          </a:xfrm>
-          <a:prstGeom prst="rect">
-            <a:avLst/>
-          </a:prstGeom>
-          <a:noFill/>
-        </p:spPr>
-        <p:txBody>
-          <a:bodyPr wrap="square" anchor="t" lIns="0" rIns="0" tIns="0" bIns="0">
-            <a:spAutoFit/>
-          </a:bodyPr>
-          <a:lstStyle/>
-          <a:p>
-            <a:pPr algn="l"/>
-            <a:r>
-              <a:rPr sz="1700" b="1">
-                <a:solidFill>
-                  <a:srgbClr val="B23A2A"/>
-                </a:solidFill>
-                <a:latin typeface="微软雅黑"/>
-                <a:ea typeface="微软雅黑"/>
-                <a:cs typeface="微软雅黑"/>
-              </a:rPr>
-              <a:t>课文精读  ·  第2课时  ·  45分钟</a:t>
-            </a:r>
-          </a:p>
-        </p:txBody>
-      </p:sp>
-      <p:sp>
-        <p:nvSpPr>
-          <p:cNvPr id="7" name="Rectangle 6"/>
-          <p:cNvSpPr/>
-          <p:nvPr/>
-        </p:nvSpPr>
-        <p:spPr>
-          <a:xfrm>
-            <a:off x="640080" y="5394960"/>
-            <a:ext cx="2011680" cy="33020"/>
+            <a:off x="640080" y="960120"/>
+            <a:ext cx="822960" cy="38100"/>
           </a:xfrm>
           <a:prstGeom prst="rect">
             <a:avLst/>
@@ -3349,14 +3186,14 @@
       </p:sp>
       <p:sp>
         <p:nvSpPr>
-          <p:cNvPr id="8" name="TextBox 7"/>
+          <p:cNvPr id="4" name="TextBox 3"/>
           <p:cNvSpPr txBox="1"/>
           <p:nvPr/>
         </p:nvSpPr>
         <p:spPr>
           <a:xfrm>
-            <a:off x="640080" y="5623560"/>
-            <a:ext cx="10911535" cy="548640"/>
+            <a:off x="777240" y="640080"/>
+            <a:ext cx="6400800" cy="365760"/>
           </a:xfrm>
           <a:prstGeom prst="rect">
             <a:avLst/>
@@ -3369,31 +3206,79 @@
           </a:bodyPr>
           <a:lstStyle/>
           <a:p>
-            <a:pPr algn="l"/>
-            <a:r>
-              <a:rPr sz="1400" b="0">
-                <a:solidFill>
-                  <a:srgbClr val="6B6258"/>
+            <a:pPr algn="l">
+              <a:spcAft>
+                <a:spcPts val="0"/>
+              </a:spcAft>
+            </a:pPr>
+            <a:r>
+              <a:rPr sz="1300" b="1">
+                <a:solidFill>
+                  <a:srgbClr val="C8A86B"/>
                 </a:solidFill>
                 <a:latin typeface="微软雅黑"/>
                 <a:ea typeface="微软雅黑"/>
                 <a:cs typeface="微软雅黑"/>
               </a:rPr>
-              <a:t>学习任务群：文学阅读与写作    |    年级：高一</a:t>
-            </a:r>
-          </a:p>
-        </p:txBody>
-      </p:sp>
-      <p:sp>
-        <p:nvSpPr>
-          <p:cNvPr id="9" name="TextBox 8"/>
+              <a:t>必修下册 · 第6单元《文学阅读与写作（小说）》· 第2课</a:t>
+            </a:r>
+          </a:p>
+        </p:txBody>
+      </p:sp>
+      <p:sp>
+        <p:nvSpPr>
+          <p:cNvPr id="5" name="Rectangle 4"/>
+          <p:cNvSpPr/>
+          <p:nvPr/>
+        </p:nvSpPr>
+        <p:spPr>
+          <a:xfrm>
+            <a:off x="777240" y="1097280"/>
+            <a:ext cx="822960" cy="30480"/>
+          </a:xfrm>
+          <a:prstGeom prst="rect">
+            <a:avLst/>
+          </a:prstGeom>
+          <a:solidFill>
+            <a:srgbClr val="C8A86B"/>
+          </a:solidFill>
+          <a:ln>
+            <a:noFill/>
+          </a:ln>
+          <a:effectLst/>
+        </p:spPr>
+        <p:style>
+          <a:lnRef idx="1">
+            <a:schemeClr val="accent1"/>
+          </a:lnRef>
+          <a:fillRef idx="3">
+            <a:schemeClr val="accent1"/>
+          </a:fillRef>
+          <a:effectRef idx="2">
+            <a:schemeClr val="accent1"/>
+          </a:effectRef>
+          <a:fontRef idx="minor">
+            <a:schemeClr val="lt1"/>
+          </a:fontRef>
+        </p:style>
+        <p:txBody>
+          <a:bodyPr rtlCol="0" anchor="ctr"/>
+          <a:lstStyle/>
+          <a:p>
+            <a:pPr algn="ctr"/>
+          </a:p>
+        </p:txBody>
+      </p:sp>
+      <p:sp>
+        <p:nvSpPr>
+          <p:cNvPr id="6" name="TextBox 5"/>
           <p:cNvSpPr txBox="1"/>
           <p:nvPr/>
         </p:nvSpPr>
         <p:spPr>
           <a:xfrm>
-            <a:off x="11002975" y="6355080"/>
-            <a:ext cx="731520" cy="320040"/>
+            <a:off x="777240" y="1600200"/>
+            <a:ext cx="10637215" cy="2011680"/>
           </a:xfrm>
           <a:prstGeom prst="rect">
             <a:avLst/>
@@ -3406,11 +3291,130 @@
           </a:bodyPr>
           <a:lstStyle/>
           <a:p>
+            <a:pPr algn="l">
+              <a:lnSpc>
+                <a:spcPct val="120000"/>
+              </a:lnSpc>
+            </a:pPr>
+            <a:r>
+              <a:rPr sz="3300" b="1">
+                <a:solidFill>
+                  <a:srgbClr val="FFFFFF"/>
+                </a:solidFill>
+                <a:latin typeface="楷体"/>
+                <a:ea typeface="楷体"/>
+                <a:cs typeface="楷体"/>
+              </a:rPr>
+              <a:t>林教头风雪山神庙 精读——性格转变与环境推动</a:t>
+            </a:r>
+          </a:p>
+        </p:txBody>
+      </p:sp>
+      <p:sp>
+        <p:nvSpPr>
+          <p:cNvPr id="7" name="TextBox 6"/>
+          <p:cNvSpPr txBox="1"/>
+          <p:nvPr/>
+        </p:nvSpPr>
+        <p:spPr>
+          <a:xfrm>
+            <a:off x="777240" y="3703320"/>
+            <a:ext cx="10637215" cy="1005840"/>
+          </a:xfrm>
+          <a:prstGeom prst="rect">
+            <a:avLst/>
+          </a:prstGeom>
+          <a:noFill/>
+        </p:spPr>
+        <p:txBody>
+          <a:bodyPr wrap="square" anchor="t" lIns="0" rIns="0" tIns="0" bIns="0">
+            <a:spAutoFit/>
+          </a:bodyPr>
+          <a:lstStyle/>
+          <a:p>
+            <a:pPr algn="l">
+              <a:lnSpc>
+                <a:spcPct val="145000"/>
+              </a:lnSpc>
+            </a:pPr>
+            <a:r>
+              <a:rPr sz="1700" b="0">
+                <a:solidFill>
+                  <a:srgbClr val="E7DFD2"/>
+                </a:solidFill>
+                <a:latin typeface="楷体"/>
+                <a:ea typeface="楷体"/>
+                <a:cs typeface="楷体"/>
+              </a:rPr>
+              <a:t>一场风雪，把一个安分教头逼成了落草的好汉。</a:t>
+            </a:r>
+          </a:p>
+        </p:txBody>
+      </p:sp>
+      <p:sp>
+        <p:nvSpPr>
+          <p:cNvPr id="8" name="TextBox 7"/>
+          <p:cNvSpPr txBox="1"/>
+          <p:nvPr/>
+        </p:nvSpPr>
+        <p:spPr>
+          <a:xfrm>
+            <a:off x="777240" y="6400800"/>
+            <a:ext cx="10637215" cy="320040"/>
+          </a:xfrm>
+          <a:prstGeom prst="rect">
+            <a:avLst/>
+          </a:prstGeom>
+          <a:noFill/>
+        </p:spPr>
+        <p:txBody>
+          <a:bodyPr wrap="square" anchor="t" lIns="0" rIns="0" tIns="0" bIns="0">
+            <a:spAutoFit/>
+          </a:bodyPr>
+          <a:lstStyle/>
+          <a:p>
+            <a:pPr algn="l"/>
+            <a:r>
+              <a:rPr sz="1100" b="0">
+                <a:solidFill>
+                  <a:srgbClr val="6B6258"/>
+                </a:solidFill>
+                <a:latin typeface="微软雅黑"/>
+                <a:ea typeface="微软雅黑"/>
+                <a:cs typeface="微软雅黑"/>
+              </a:rPr>
+              <a:t>本课件未使用无关配图，画面以学科色块呈现。</a:t>
+            </a:r>
+          </a:p>
+        </p:txBody>
+      </p:sp>
+      <p:sp>
+        <p:nvSpPr>
+          <p:cNvPr id="9" name="TextBox 8"/>
+          <p:cNvSpPr txBox="1"/>
+          <p:nvPr/>
+        </p:nvSpPr>
+        <p:spPr>
+          <a:xfrm>
+            <a:off x="11002975" y="6355080"/>
+            <a:ext cx="731520" cy="320040"/>
+          </a:xfrm>
+          <a:prstGeom prst="rect">
+            <a:avLst/>
+          </a:prstGeom>
+          <a:noFill/>
+        </p:spPr>
+        <p:txBody>
+          <a:bodyPr wrap="square" anchor="t" lIns="0" rIns="0" tIns="0" bIns="0">
+            <a:spAutoFit/>
+          </a:bodyPr>
+          <a:lstStyle/>
+          <a:p>
             <a:pPr algn="r"/>
             <a:r>
               <a:rPr sz="1100" b="0">
                 <a:solidFill>
-                  <a:srgbClr val="6B6258"/>
+                  <a:srgbClr val="FFFFFF"/>
                 </a:solidFill>
                 <a:latin typeface="微软雅黑"/>
                 <a:ea typeface="微软雅黑"/>
@@ -3519,7 +3523,7 @@
                 <a:ea typeface="微软雅黑"/>
                 <a:cs typeface="微软雅黑"/>
               </a:rPr>
-              <a:t>学习目标</a:t>
+              <a:t>本课目标</a:t>
             </a:r>
           </a:p>
         </p:txBody>
@@ -3570,14 +3574,51 @@
       </p:sp>
       <p:sp>
         <p:nvSpPr>
-          <p:cNvPr id="5" name="Rounded Rectangle 4"/>
+          <p:cNvPr id="5" name="TextBox 4"/>
+          <p:cNvSpPr txBox="1"/>
+          <p:nvPr/>
+        </p:nvSpPr>
+        <p:spPr>
+          <a:xfrm>
+            <a:off x="640080" y="1325880"/>
+            <a:ext cx="10058400" cy="548640"/>
+          </a:xfrm>
+          <a:prstGeom prst="rect">
+            <a:avLst/>
+          </a:prstGeom>
+          <a:noFill/>
+        </p:spPr>
+        <p:txBody>
+          <a:bodyPr wrap="square" anchor="t" lIns="0" rIns="0" tIns="0" bIns="0">
+            <a:spAutoFit/>
+          </a:bodyPr>
+          <a:lstStyle/>
+          <a:p>
+            <a:pPr algn="l"/>
+            <a:r>
+              <a:rPr sz="3000" b="1">
+                <a:solidFill>
+                  <a:srgbClr val="1C2A33"/>
+                </a:solidFill>
+                <a:latin typeface="楷体"/>
+                <a:ea typeface="楷体"/>
+                <a:cs typeface="楷体"/>
+              </a:rPr>
+              <a:t>四向学习目标</a:t>
+            </a:r>
+          </a:p>
+        </p:txBody>
+      </p:sp>
+      <p:sp>
+        <p:nvSpPr>
+          <p:cNvPr id="6" name="Rounded Rectangle 5"/>
           <p:cNvSpPr/>
           <p:nvPr/>
         </p:nvSpPr>
         <p:spPr>
           <a:xfrm>
-            <a:off x="640080" y="1417320"/>
-            <a:ext cx="5349240" cy="2057400"/>
+            <a:off x="640080" y="2377440"/>
+            <a:ext cx="2453563" cy="3383280"/>
           </a:xfrm>
           <a:prstGeom prst="roundRect">
             <a:avLst/>
@@ -3585,7 +3626,7 @@
           <a:solidFill>
             <a:srgbClr val="FFFFFF"/>
           </a:solidFill>
-          <a:ln w="22860">
+          <a:ln w="20320">
             <a:solidFill>
               <a:srgbClr val="B23A2A"/>
             </a:solidFill>
@@ -3616,14 +3657,14 @@
       </p:sp>
       <p:sp>
         <p:nvSpPr>
-          <p:cNvPr id="6" name="Oval 5"/>
+          <p:cNvPr id="7" name="Oval 6"/>
           <p:cNvSpPr/>
           <p:nvPr/>
         </p:nvSpPr>
         <p:spPr>
           <a:xfrm>
-            <a:off x="804672" y="1581912"/>
-            <a:ext cx="457200" cy="457200"/>
+            <a:off x="1455381" y="2697480"/>
+            <a:ext cx="822960" cy="822960"/>
           </a:xfrm>
           <a:prstGeom prst="ellipse">
             <a:avLst/>
@@ -3660,14 +3701,14 @@
       </p:sp>
       <p:sp>
         <p:nvSpPr>
-          <p:cNvPr id="7" name="TextBox 6"/>
+          <p:cNvPr id="8" name="TextBox 7"/>
           <p:cNvSpPr txBox="1"/>
           <p:nvPr/>
         </p:nvSpPr>
         <p:spPr>
           <a:xfrm>
-            <a:off x="804672" y="1636776"/>
-            <a:ext cx="457200" cy="384048"/>
+            <a:off x="1455381" y="2880360"/>
+            <a:ext cx="822960" cy="457200"/>
           </a:xfrm>
           <a:prstGeom prst="rect">
             <a:avLst/>
@@ -3682,29 +3723,66 @@
           <a:p>
             <a:pPr algn="ctr"/>
             <a:r>
-              <a:rPr sz="1600" b="1">
+              <a:rPr sz="2400" b="1">
                 <a:solidFill>
                   <a:srgbClr val="FFFFFF"/>
+                </a:solidFill>
+                <a:latin typeface="楷体"/>
+                <a:ea typeface="楷体"/>
+                <a:cs typeface="楷体"/>
+              </a:rPr>
+              <a:t>1</a:t>
+            </a:r>
+          </a:p>
+        </p:txBody>
+      </p:sp>
+      <p:sp>
+        <p:nvSpPr>
+          <p:cNvPr id="9" name="TextBox 8"/>
+          <p:cNvSpPr txBox="1"/>
+          <p:nvPr/>
+        </p:nvSpPr>
+        <p:spPr>
+          <a:xfrm>
+            <a:off x="822960" y="3749040"/>
+            <a:ext cx="2087803" cy="548640"/>
+          </a:xfrm>
+          <a:prstGeom prst="rect">
+            <a:avLst/>
+          </a:prstGeom>
+          <a:noFill/>
+        </p:spPr>
+        <p:txBody>
+          <a:bodyPr wrap="square" anchor="t" lIns="0" rIns="0" tIns="0" bIns="0">
+            <a:spAutoFit/>
+          </a:bodyPr>
+          <a:lstStyle/>
+          <a:p>
+            <a:pPr algn="ctr"/>
+            <a:r>
+              <a:rPr sz="1700" b="1">
+                <a:solidFill>
+                  <a:srgbClr val="B23A2A"/>
                 </a:solidFill>
                 <a:latin typeface="微软雅黑"/>
                 <a:ea typeface="微软雅黑"/>
                 <a:cs typeface="微软雅黑"/>
               </a:rPr>
-              <a:t>1</a:t>
-            </a:r>
-          </a:p>
-        </p:txBody>
-      </p:sp>
-      <p:sp>
-        <p:nvSpPr>
-          <p:cNvPr id="8" name="TextBox 7"/>
+              <a:t>语言能力</a:t>
+            </a:r>
+          </a:p>
+        </p:txBody>
+      </p:sp>
+      <p:sp>
+        <p:nvSpPr>
+          <p:cNvPr id="10" name="TextBox 9"/>
           <p:cNvSpPr txBox="1"/>
           <p:nvPr/>
         </p:nvSpPr>
         <p:spPr>
           <a:xfrm>
-            <a:off x="1371600" y="1527048"/>
-            <a:ext cx="4434840" cy="457200"/>
+            <a:off x="841248" y="4343400"/>
+            <a:ext cx="2051227" cy="1280160"/>
           </a:xfrm>
           <a:prstGeom prst="rect">
             <a:avLst/>
@@ -3717,54 +3795,13 @@
           </a:bodyPr>
           <a:lstStyle/>
           <a:p>
-            <a:pPr algn="l">
+            <a:pPr algn="ctr">
               <a:lnSpc>
-                <a:spcPct val="110000"/>
+                <a:spcPct val="145000"/>
               </a:lnSpc>
             </a:pPr>
             <a:r>
-              <a:rPr sz="1600" b="1">
-                <a:solidFill>
-                  <a:srgbClr val="1C2A33"/>
-                </a:solidFill>
-                <a:latin typeface="微软雅黑"/>
-                <a:ea typeface="微软雅黑"/>
-                <a:cs typeface="微软雅黑"/>
-              </a:rPr>
-              <a:t>目标</a:t>
-            </a:r>
-          </a:p>
-        </p:txBody>
-      </p:sp>
-      <p:sp>
-        <p:nvSpPr>
-          <p:cNvPr id="9" name="TextBox 8"/>
-          <p:cNvSpPr txBox="1"/>
-          <p:nvPr/>
-        </p:nvSpPr>
-        <p:spPr>
-          <a:xfrm>
-            <a:off x="1371600" y="1965960"/>
-            <a:ext cx="4434840" cy="1417320"/>
-          </a:xfrm>
-          <a:prstGeom prst="rect">
-            <a:avLst/>
-          </a:prstGeom>
-          <a:noFill/>
-        </p:spPr>
-        <p:txBody>
-          <a:bodyPr wrap="square" anchor="t" lIns="0" rIns="0" tIns="0" bIns="0">
-            <a:spAutoFit/>
-          </a:bodyPr>
-          <a:lstStyle/>
-          <a:p>
-            <a:pPr algn="l">
-              <a:lnSpc>
-                <a:spcPct val="128000"/>
-              </a:lnSpc>
-            </a:pPr>
-            <a:r>
-              <a:rPr sz="1200" b="0">
+              <a:rPr sz="1300" b="0">
                 <a:solidFill>
                   <a:srgbClr val="1C2A33"/>
                 </a:solidFill>
@@ -3772,21 +3809,21 @@
                 <a:ea typeface="楷体"/>
                 <a:cs typeface="楷体"/>
               </a:rPr>
-              <a:t>语言能力：说出林冲性格从「逆来顺受」到「奋起反抗」的转变节点，解释风雪环境的作用。</a:t>
-            </a:r>
-          </a:p>
-        </p:txBody>
-      </p:sp>
-      <p:sp>
-        <p:nvSpPr>
-          <p:cNvPr id="10" name="Rounded Rectangle 9"/>
+              <a:t>说出林冲性格从「逆来顺受」到「奋起反抗」的转变节点，解释风雪环境的作用</a:t>
+            </a:r>
+          </a:p>
+        </p:txBody>
+      </p:sp>
+      <p:sp>
+        <p:nvSpPr>
+          <p:cNvPr id="11" name="Rounded Rectangle 10"/>
           <p:cNvSpPr/>
           <p:nvPr/>
         </p:nvSpPr>
         <p:spPr>
           <a:xfrm>
-            <a:off x="6263640" y="1417320"/>
-            <a:ext cx="5349240" cy="2057400"/>
+            <a:off x="3459403" y="2377440"/>
+            <a:ext cx="2453563" cy="3383280"/>
           </a:xfrm>
           <a:prstGeom prst="roundRect">
             <a:avLst/>
@@ -3794,9 +3831,9 @@
           <a:solidFill>
             <a:srgbClr val="FFFFFF"/>
           </a:solidFill>
-          <a:ln w="22860">
+          <a:ln w="20320">
             <a:solidFill>
-              <a:srgbClr val="B23A2A"/>
+              <a:srgbClr val="2E7D6B"/>
             </a:solidFill>
           </a:ln>
           <a:effectLst/>
@@ -3825,20 +3862,20 @@
       </p:sp>
       <p:sp>
         <p:nvSpPr>
-          <p:cNvPr id="11" name="Oval 10"/>
+          <p:cNvPr id="12" name="Oval 11"/>
           <p:cNvSpPr/>
           <p:nvPr/>
         </p:nvSpPr>
         <p:spPr>
           <a:xfrm>
-            <a:off x="6428232" y="1581912"/>
-            <a:ext cx="457200" cy="457200"/>
+            <a:off x="4274705" y="2697480"/>
+            <a:ext cx="822960" cy="822960"/>
           </a:xfrm>
           <a:prstGeom prst="ellipse">
             <a:avLst/>
           </a:prstGeom>
           <a:solidFill>
-            <a:srgbClr val="B23A2A"/>
+            <a:srgbClr val="2E7D6B"/>
           </a:solidFill>
           <a:ln>
             <a:noFill/>
@@ -3869,14 +3906,14 @@
       </p:sp>
       <p:sp>
         <p:nvSpPr>
-          <p:cNvPr id="12" name="TextBox 11"/>
+          <p:cNvPr id="13" name="TextBox 12"/>
           <p:cNvSpPr txBox="1"/>
           <p:nvPr/>
         </p:nvSpPr>
         <p:spPr>
           <a:xfrm>
-            <a:off x="6428232" y="1636776"/>
-            <a:ext cx="457200" cy="384048"/>
+            <a:off x="4274705" y="2880360"/>
+            <a:ext cx="822960" cy="457200"/>
           </a:xfrm>
           <a:prstGeom prst="rect">
             <a:avLst/>
@@ -3891,29 +3928,66 @@
           <a:p>
             <a:pPr algn="ctr"/>
             <a:r>
-              <a:rPr sz="1600" b="1">
+              <a:rPr sz="2400" b="1">
                 <a:solidFill>
                   <a:srgbClr val="FFFFFF"/>
+                </a:solidFill>
+                <a:latin typeface="楷体"/>
+                <a:ea typeface="楷体"/>
+                <a:cs typeface="楷体"/>
+              </a:rPr>
+              <a:t>2</a:t>
+            </a:r>
+          </a:p>
+        </p:txBody>
+      </p:sp>
+      <p:sp>
+        <p:nvSpPr>
+          <p:cNvPr id="14" name="TextBox 13"/>
+          <p:cNvSpPr txBox="1"/>
+          <p:nvPr/>
+        </p:nvSpPr>
+        <p:spPr>
+          <a:xfrm>
+            <a:off x="3642283" y="3749040"/>
+            <a:ext cx="2087803" cy="548640"/>
+          </a:xfrm>
+          <a:prstGeom prst="rect">
+            <a:avLst/>
+          </a:prstGeom>
+          <a:noFill/>
+        </p:spPr>
+        <p:txBody>
+          <a:bodyPr wrap="square" anchor="t" lIns="0" rIns="0" tIns="0" bIns="0">
+            <a:spAutoFit/>
+          </a:bodyPr>
+          <a:lstStyle/>
+          <a:p>
+            <a:pPr algn="ctr"/>
+            <a:r>
+              <a:rPr sz="1700" b="1">
+                <a:solidFill>
+                  <a:srgbClr val="2E7D6B"/>
                 </a:solidFill>
                 <a:latin typeface="微软雅黑"/>
                 <a:ea typeface="微软雅黑"/>
                 <a:cs typeface="微软雅黑"/>
               </a:rPr>
-              <a:t>2</a:t>
-            </a:r>
-          </a:p>
-        </p:txBody>
-      </p:sp>
-      <p:sp>
-        <p:nvSpPr>
-          <p:cNvPr id="13" name="TextBox 12"/>
+              <a:t>文化意识</a:t>
+            </a:r>
+          </a:p>
+        </p:txBody>
+      </p:sp>
+      <p:sp>
+        <p:nvSpPr>
+          <p:cNvPr id="15" name="TextBox 14"/>
           <p:cNvSpPr txBox="1"/>
           <p:nvPr/>
         </p:nvSpPr>
         <p:spPr>
           <a:xfrm>
-            <a:off x="6995160" y="1527048"/>
-            <a:ext cx="4434840" cy="457200"/>
+            <a:off x="3660571" y="4343400"/>
+            <a:ext cx="2051227" cy="1280160"/>
           </a:xfrm>
           <a:prstGeom prst="rect">
             <a:avLst/>
@@ -3926,54 +4000,13 @@
           </a:bodyPr>
           <a:lstStyle/>
           <a:p>
-            <a:pPr algn="l">
+            <a:pPr algn="ctr">
               <a:lnSpc>
-                <a:spcPct val="110000"/>
+                <a:spcPct val="145000"/>
               </a:lnSpc>
             </a:pPr>
             <a:r>
-              <a:rPr sz="1600" b="1">
-                <a:solidFill>
-                  <a:srgbClr val="1C2A33"/>
-                </a:solidFill>
-                <a:latin typeface="微软雅黑"/>
-                <a:ea typeface="微软雅黑"/>
-                <a:cs typeface="微软雅黑"/>
-              </a:rPr>
-              <a:t>目标</a:t>
-            </a:r>
-          </a:p>
-        </p:txBody>
-      </p:sp>
-      <p:sp>
-        <p:nvSpPr>
-          <p:cNvPr id="14" name="TextBox 13"/>
-          <p:cNvSpPr txBox="1"/>
-          <p:nvPr/>
-        </p:nvSpPr>
-        <p:spPr>
-          <a:xfrm>
-            <a:off x="6995160" y="1965960"/>
-            <a:ext cx="4434840" cy="1417320"/>
-          </a:xfrm>
-          <a:prstGeom prst="rect">
-            <a:avLst/>
-          </a:prstGeom>
-          <a:noFill/>
-        </p:spPr>
-        <p:txBody>
-          <a:bodyPr wrap="square" anchor="t" lIns="0" rIns="0" tIns="0" bIns="0">
-            <a:spAutoFit/>
-          </a:bodyPr>
-          <a:lstStyle/>
-          <a:p>
-            <a:pPr algn="l">
-              <a:lnSpc>
-                <a:spcPct val="128000"/>
-              </a:lnSpc>
-            </a:pPr>
-            <a:r>
-              <a:rPr sz="1400" b="0">
+              <a:rPr sz="1300" b="0">
                 <a:solidFill>
                   <a:srgbClr val="1C2A33"/>
                 </a:solidFill>
@@ -3981,21 +4014,21 @@
                 <a:ea typeface="楷体"/>
                 <a:cs typeface="楷体"/>
               </a:rPr>
-              <a:t>文化意识：理解「官逼民反」的时代悲剧与反抗正义。</a:t>
-            </a:r>
-          </a:p>
-        </p:txBody>
-      </p:sp>
-      <p:sp>
-        <p:nvSpPr>
-          <p:cNvPr id="15" name="Rounded Rectangle 14"/>
+              <a:t>理解「官逼民反」的时代悲剧与反抗正义</a:t>
+            </a:r>
+          </a:p>
+        </p:txBody>
+      </p:sp>
+      <p:sp>
+        <p:nvSpPr>
+          <p:cNvPr id="16" name="Rounded Rectangle 15"/>
           <p:cNvSpPr/>
           <p:nvPr/>
         </p:nvSpPr>
         <p:spPr>
           <a:xfrm>
-            <a:off x="640080" y="3703320"/>
-            <a:ext cx="5349240" cy="2057400"/>
+            <a:off x="6278727" y="2377440"/>
+            <a:ext cx="2453563" cy="3383280"/>
           </a:xfrm>
           <a:prstGeom prst="roundRect">
             <a:avLst/>
@@ -4003,9 +4036,9 @@
           <a:solidFill>
             <a:srgbClr val="FFFFFF"/>
           </a:solidFill>
-          <a:ln w="22860">
+          <a:ln w="20320">
             <a:solidFill>
-              <a:srgbClr val="B23A2A"/>
+              <a:srgbClr val="C8A86B"/>
             </a:solidFill>
           </a:ln>
           <a:effectLst/>
@@ -4034,20 +4067,20 @@
       </p:sp>
       <p:sp>
         <p:nvSpPr>
-          <p:cNvPr id="16" name="Oval 15"/>
+          <p:cNvPr id="17" name="Oval 16"/>
           <p:cNvSpPr/>
           <p:nvPr/>
         </p:nvSpPr>
         <p:spPr>
           <a:xfrm>
-            <a:off x="804672" y="3867912"/>
-            <a:ext cx="457200" cy="457200"/>
+            <a:off x="7094029" y="2697480"/>
+            <a:ext cx="822960" cy="822960"/>
           </a:xfrm>
           <a:prstGeom prst="ellipse">
             <a:avLst/>
           </a:prstGeom>
           <a:solidFill>
-            <a:srgbClr val="B23A2A"/>
+            <a:srgbClr val="C8A86B"/>
           </a:solidFill>
           <a:ln>
             <a:noFill/>
@@ -4078,14 +4111,14 @@
       </p:sp>
       <p:sp>
         <p:nvSpPr>
-          <p:cNvPr id="17" name="TextBox 16"/>
+          <p:cNvPr id="18" name="TextBox 17"/>
           <p:cNvSpPr txBox="1"/>
           <p:nvPr/>
         </p:nvSpPr>
         <p:spPr>
           <a:xfrm>
-            <a:off x="804672" y="3922776"/>
-            <a:ext cx="457200" cy="384048"/>
+            <a:off x="7094029" y="2880360"/>
+            <a:ext cx="822960" cy="457200"/>
           </a:xfrm>
           <a:prstGeom prst="rect">
             <a:avLst/>
@@ -4100,29 +4133,66 @@
           <a:p>
             <a:pPr algn="ctr"/>
             <a:r>
-              <a:rPr sz="1600" b="1">
+              <a:rPr sz="2400" b="1">
                 <a:solidFill>
                   <a:srgbClr val="FFFFFF"/>
+                </a:solidFill>
+                <a:latin typeface="楷体"/>
+                <a:ea typeface="楷体"/>
+                <a:cs typeface="楷体"/>
+              </a:rPr>
+              <a:t>3</a:t>
+            </a:r>
+          </a:p>
+        </p:txBody>
+      </p:sp>
+      <p:sp>
+        <p:nvSpPr>
+          <p:cNvPr id="19" name="TextBox 18"/>
+          <p:cNvSpPr txBox="1"/>
+          <p:nvPr/>
+        </p:nvSpPr>
+        <p:spPr>
+          <a:xfrm>
+            <a:off x="6461607" y="3749040"/>
+            <a:ext cx="2087803" cy="548640"/>
+          </a:xfrm>
+          <a:prstGeom prst="rect">
+            <a:avLst/>
+          </a:prstGeom>
+          <a:noFill/>
+        </p:spPr>
+        <p:txBody>
+          <a:bodyPr wrap="square" anchor="t" lIns="0" rIns="0" tIns="0" bIns="0">
+            <a:spAutoFit/>
+          </a:bodyPr>
+          <a:lstStyle/>
+          <a:p>
+            <a:pPr algn="ctr"/>
+            <a:r>
+              <a:rPr sz="1700" b="1">
+                <a:solidFill>
+                  <a:srgbClr val="C8A86B"/>
                 </a:solidFill>
                 <a:latin typeface="微软雅黑"/>
                 <a:ea typeface="微软雅黑"/>
                 <a:cs typeface="微软雅黑"/>
               </a:rPr>
-              <a:t>3</a:t>
-            </a:r>
-          </a:p>
-        </p:txBody>
-      </p:sp>
-      <p:sp>
-        <p:nvSpPr>
-          <p:cNvPr id="18" name="TextBox 17"/>
+              <a:t>思维品质</a:t>
+            </a:r>
+          </a:p>
+        </p:txBody>
+      </p:sp>
+      <p:sp>
+        <p:nvSpPr>
+          <p:cNvPr id="20" name="TextBox 19"/>
           <p:cNvSpPr txBox="1"/>
           <p:nvPr/>
         </p:nvSpPr>
         <p:spPr>
           <a:xfrm>
-            <a:off x="1371600" y="3813048"/>
-            <a:ext cx="4434840" cy="457200"/>
+            <a:off x="6479895" y="4343400"/>
+            <a:ext cx="2051227" cy="1280160"/>
           </a:xfrm>
           <a:prstGeom prst="rect">
             <a:avLst/>
@@ -4135,54 +4205,13 @@
           </a:bodyPr>
           <a:lstStyle/>
           <a:p>
-            <a:pPr algn="l">
+            <a:pPr algn="ctr">
               <a:lnSpc>
-                <a:spcPct val="110000"/>
+                <a:spcPct val="145000"/>
               </a:lnSpc>
             </a:pPr>
             <a:r>
-              <a:rPr sz="1600" b="1">
-                <a:solidFill>
-                  <a:srgbClr val="1C2A33"/>
-                </a:solidFill>
-                <a:latin typeface="微软雅黑"/>
-                <a:ea typeface="微软雅黑"/>
-                <a:cs typeface="微软雅黑"/>
-              </a:rPr>
-              <a:t>目标</a:t>
-            </a:r>
-          </a:p>
-        </p:txBody>
-      </p:sp>
-      <p:sp>
-        <p:nvSpPr>
-          <p:cNvPr id="19" name="TextBox 18"/>
-          <p:cNvSpPr txBox="1"/>
-          <p:nvPr/>
-        </p:nvSpPr>
-        <p:spPr>
-          <a:xfrm>
-            <a:off x="1371600" y="4251960"/>
-            <a:ext cx="4434840" cy="1417320"/>
-          </a:xfrm>
-          <a:prstGeom prst="rect">
-            <a:avLst/>
-          </a:prstGeom>
-          <a:noFill/>
-        </p:spPr>
-        <p:txBody>
-          <a:bodyPr wrap="square" anchor="t" lIns="0" rIns="0" tIns="0" bIns="0">
-            <a:spAutoFit/>
-          </a:bodyPr>
-          <a:lstStyle/>
-          <a:p>
-            <a:pPr algn="l">
-              <a:lnSpc>
-                <a:spcPct val="128000"/>
-              </a:lnSpc>
-            </a:pPr>
-            <a:r>
-              <a:rPr sz="1400" b="0">
+              <a:rPr sz="1300" b="0">
                 <a:solidFill>
                   <a:srgbClr val="1C2A33"/>
                 </a:solidFill>
@@ -4190,21 +4219,21 @@
                 <a:ea typeface="楷体"/>
                 <a:cs typeface="楷体"/>
               </a:rPr>
-              <a:t>思维品质：通过分析环境与性格关系，培养「环境推动转变」的小说思维。</a:t>
-            </a:r>
-          </a:p>
-        </p:txBody>
-      </p:sp>
-      <p:sp>
-        <p:nvSpPr>
-          <p:cNvPr id="20" name="Rounded Rectangle 19"/>
+              <a:t>通过分析环境与性格关系，培养「环境推动转变」的小说思维</a:t>
+            </a:r>
+          </a:p>
+        </p:txBody>
+      </p:sp>
+      <p:sp>
+        <p:nvSpPr>
+          <p:cNvPr id="21" name="Rounded Rectangle 20"/>
           <p:cNvSpPr/>
           <p:nvPr/>
         </p:nvSpPr>
         <p:spPr>
           <a:xfrm>
-            <a:off x="6263640" y="3703320"/>
-            <a:ext cx="5349240" cy="2057400"/>
+            <a:off x="9098051" y="2377440"/>
+            <a:ext cx="2453563" cy="3383280"/>
           </a:xfrm>
           <a:prstGeom prst="roundRect">
             <a:avLst/>
@@ -4212,9 +4241,9 @@
           <a:solidFill>
             <a:srgbClr val="FFFFFF"/>
           </a:solidFill>
-          <a:ln w="22860">
+          <a:ln w="20320">
             <a:solidFill>
-              <a:srgbClr val="B23A2A"/>
+              <a:srgbClr val="6B6258"/>
             </a:solidFill>
           </a:ln>
           <a:effectLst/>
@@ -4243,20 +4272,20 @@
       </p:sp>
       <p:sp>
         <p:nvSpPr>
-          <p:cNvPr id="21" name="Oval 20"/>
+          <p:cNvPr id="22" name="Oval 21"/>
           <p:cNvSpPr/>
           <p:nvPr/>
         </p:nvSpPr>
         <p:spPr>
           <a:xfrm>
-            <a:off x="6428232" y="3867912"/>
-            <a:ext cx="457200" cy="457200"/>
+            <a:off x="9913353" y="2697480"/>
+            <a:ext cx="822960" cy="822960"/>
           </a:xfrm>
           <a:prstGeom prst="ellipse">
             <a:avLst/>
           </a:prstGeom>
           <a:solidFill>
-            <a:srgbClr val="B23A2A"/>
+            <a:srgbClr val="6B6258"/>
           </a:solidFill>
           <a:ln>
             <a:noFill/>
@@ -4287,14 +4316,14 @@
       </p:sp>
       <p:sp>
         <p:nvSpPr>
-          <p:cNvPr id="22" name="TextBox 21"/>
+          <p:cNvPr id="23" name="TextBox 22"/>
           <p:cNvSpPr txBox="1"/>
           <p:nvPr/>
         </p:nvSpPr>
         <p:spPr>
           <a:xfrm>
-            <a:off x="6428232" y="3922776"/>
-            <a:ext cx="457200" cy="384048"/>
+            <a:off x="9913353" y="2880360"/>
+            <a:ext cx="822960" cy="457200"/>
           </a:xfrm>
           <a:prstGeom prst="rect">
             <a:avLst/>
@@ -4309,29 +4338,66 @@
           <a:p>
             <a:pPr algn="ctr"/>
             <a:r>
-              <a:rPr sz="1600" b="1">
+              <a:rPr sz="2400" b="1">
                 <a:solidFill>
                   <a:srgbClr val="FFFFFF"/>
+                </a:solidFill>
+                <a:latin typeface="楷体"/>
+                <a:ea typeface="楷体"/>
+                <a:cs typeface="楷体"/>
+              </a:rPr>
+              <a:t>4</a:t>
+            </a:r>
+          </a:p>
+        </p:txBody>
+      </p:sp>
+      <p:sp>
+        <p:nvSpPr>
+          <p:cNvPr id="24" name="TextBox 23"/>
+          <p:cNvSpPr txBox="1"/>
+          <p:nvPr/>
+        </p:nvSpPr>
+        <p:spPr>
+          <a:xfrm>
+            <a:off x="9280931" y="3749040"/>
+            <a:ext cx="2087803" cy="548640"/>
+          </a:xfrm>
+          <a:prstGeom prst="rect">
+            <a:avLst/>
+          </a:prstGeom>
+          <a:noFill/>
+        </p:spPr>
+        <p:txBody>
+          <a:bodyPr wrap="square" anchor="t" lIns="0" rIns="0" tIns="0" bIns="0">
+            <a:spAutoFit/>
+          </a:bodyPr>
+          <a:lstStyle/>
+          <a:p>
+            <a:pPr algn="ctr"/>
+            <a:r>
+              <a:rPr sz="1700" b="1">
+                <a:solidFill>
+                  <a:srgbClr val="6B6258"/>
                 </a:solidFill>
                 <a:latin typeface="微软雅黑"/>
                 <a:ea typeface="微软雅黑"/>
                 <a:cs typeface="微软雅黑"/>
               </a:rPr>
-              <a:t>4</a:t>
-            </a:r>
-          </a:p>
-        </p:txBody>
-      </p:sp>
-      <p:sp>
-        <p:nvSpPr>
-          <p:cNvPr id="23" name="TextBox 22"/>
+              <a:t>学习能力</a:t>
+            </a:r>
+          </a:p>
+        </p:txBody>
+      </p:sp>
+      <p:sp>
+        <p:nvSpPr>
+          <p:cNvPr id="25" name="TextBox 24"/>
           <p:cNvSpPr txBox="1"/>
           <p:nvPr/>
         </p:nvSpPr>
         <p:spPr>
           <a:xfrm>
-            <a:off x="6995160" y="3813048"/>
-            <a:ext cx="4434840" cy="457200"/>
+            <a:off x="9299219" y="4343400"/>
+            <a:ext cx="2051227" cy="1280160"/>
           </a:xfrm>
           <a:prstGeom prst="rect">
             <a:avLst/>
@@ -4344,54 +4410,13 @@
           </a:bodyPr>
           <a:lstStyle/>
           <a:p>
-            <a:pPr algn="l">
+            <a:pPr algn="ctr">
               <a:lnSpc>
-                <a:spcPct val="110000"/>
+                <a:spcPct val="145000"/>
               </a:lnSpc>
             </a:pPr>
             <a:r>
-              <a:rPr sz="1600" b="1">
-                <a:solidFill>
-                  <a:srgbClr val="1C2A33"/>
-                </a:solidFill>
-                <a:latin typeface="微软雅黑"/>
-                <a:ea typeface="微软雅黑"/>
-                <a:cs typeface="微软雅黑"/>
-              </a:rPr>
-              <a:t>目标</a:t>
-            </a:r>
-          </a:p>
-        </p:txBody>
-      </p:sp>
-      <p:sp>
-        <p:nvSpPr>
-          <p:cNvPr id="24" name="TextBox 23"/>
-          <p:cNvSpPr txBox="1"/>
-          <p:nvPr/>
-        </p:nvSpPr>
-        <p:spPr>
-          <a:xfrm>
-            <a:off x="6995160" y="4251960"/>
-            <a:ext cx="4434840" cy="1417320"/>
-          </a:xfrm>
-          <a:prstGeom prst="rect">
-            <a:avLst/>
-          </a:prstGeom>
-          <a:noFill/>
-        </p:spPr>
-        <p:txBody>
-          <a:bodyPr wrap="square" anchor="t" lIns="0" rIns="0" tIns="0" bIns="0">
-            <a:spAutoFit/>
-          </a:bodyPr>
-          <a:lstStyle/>
-          <a:p>
-            <a:pPr algn="l">
-              <a:lnSpc>
-                <a:spcPct val="128000"/>
-              </a:lnSpc>
-            </a:pPr>
-            <a:r>
-              <a:rPr sz="1400" b="0">
+              <a:rPr sz="1300" b="0">
                 <a:solidFill>
                   <a:srgbClr val="1C2A33"/>
                 </a:solidFill>
@@ -4399,14 +4424,14 @@
                 <a:ea typeface="楷体"/>
                 <a:cs typeface="楷体"/>
               </a:rPr>
-              <a:t>学习能力：掌握「抓转变、析环境、明主题」的小说读法。</a:t>
-            </a:r>
-          </a:p>
-        </p:txBody>
-      </p:sp>
-      <p:sp>
-        <p:nvSpPr>
-          <p:cNvPr id="25" name="TextBox 24"/>
+              <a:t>掌握「抓转变、析环境、明主题」的小说读法</a:t>
+            </a:r>
+          </a:p>
+        </p:txBody>
+      </p:sp>
+      <p:sp>
+        <p:nvSpPr>
+          <p:cNvPr id="26" name="TextBox 25"/>
           <p:cNvSpPr txBox="1"/>
           <p:nvPr/>
         </p:nvSpPr>
@@ -4533,13 +4558,13 @@
             <a:r>
               <a:rPr sz="1300" b="1">
                 <a:solidFill>
-                  <a:srgbClr val="2E7D6B"/>
+                  <a:srgbClr val="B23A2A"/>
                 </a:solidFill>
                 <a:latin typeface="微软雅黑"/>
                 <a:ea typeface="微软雅黑"/>
                 <a:cs typeface="微软雅黑"/>
               </a:rPr>
-              <a:t>课文背景</a:t>
+              <a:t>背景 · 权威调研</a:t>
             </a:r>
           </a:p>
         </p:txBody>
@@ -4559,7 +4584,7 @@
             <a:avLst/>
           </a:prstGeom>
           <a:solidFill>
-            <a:srgbClr val="2E7D6B"/>
+            <a:srgbClr val="B23A2A"/>
           </a:solidFill>
           <a:ln>
             <a:noFill/>
@@ -4596,8 +4621,82 @@
         </p:nvSpPr>
         <p:spPr>
           <a:xfrm>
-            <a:off x="640080" y="1508760"/>
-            <a:ext cx="6766560" cy="4572000"/>
+            <a:off x="640080" y="1325880"/>
+            <a:ext cx="10058400" cy="548640"/>
+          </a:xfrm>
+          <a:prstGeom prst="rect">
+            <a:avLst/>
+          </a:prstGeom>
+          <a:noFill/>
+        </p:spPr>
+        <p:txBody>
+          <a:bodyPr wrap="square" anchor="t" lIns="0" rIns="0" tIns="0" bIns="0">
+            <a:spAutoFit/>
+          </a:bodyPr>
+          <a:lstStyle/>
+          <a:p>
+            <a:pPr algn="l"/>
+            <a:r>
+              <a:rPr sz="2800" b="1">
+                <a:solidFill>
+                  <a:srgbClr val="1C2A33"/>
+                </a:solidFill>
+                <a:latin typeface="楷体"/>
+                <a:ea typeface="楷体"/>
+                <a:cs typeface="楷体"/>
+              </a:rPr>
+              <a:t>教材定位与来源</a:t>
+            </a:r>
+          </a:p>
+        </p:txBody>
+      </p:sp>
+      <p:sp>
+        <p:nvSpPr>
+          <p:cNvPr id="6" name="TextBox 5"/>
+          <p:cNvSpPr txBox="1"/>
+          <p:nvPr/>
+        </p:nvSpPr>
+        <p:spPr>
+          <a:xfrm>
+            <a:off x="640080" y="1783080"/>
+            <a:ext cx="5227167" cy="457200"/>
+          </a:xfrm>
+          <a:prstGeom prst="rect">
+            <a:avLst/>
+          </a:prstGeom>
+          <a:noFill/>
+        </p:spPr>
+        <p:txBody>
+          <a:bodyPr wrap="square" anchor="t" lIns="0" rIns="0" tIns="0" bIns="0">
+            <a:spAutoFit/>
+          </a:bodyPr>
+          <a:lstStyle/>
+          <a:p>
+            <a:pPr algn="l"/>
+            <a:r>
+              <a:rPr sz="1800" b="1">
+                <a:solidFill>
+                  <a:srgbClr val="B23A2A"/>
+                </a:solidFill>
+                <a:latin typeface="楷体"/>
+                <a:ea typeface="楷体"/>
+                <a:cs typeface="楷体"/>
+              </a:rPr>
+              <a:t>课文定位</a:t>
+            </a:r>
+          </a:p>
+        </p:txBody>
+      </p:sp>
+      <p:sp>
+        <p:nvSpPr>
+          <p:cNvPr id="7" name="TextBox 6"/>
+          <p:cNvSpPr txBox="1"/>
+          <p:nvPr/>
+        </p:nvSpPr>
+        <p:spPr>
+          <a:xfrm>
+            <a:off x="640080" y="2286000"/>
+            <a:ext cx="5227167" cy="4206240"/>
           </a:xfrm>
           <a:prstGeom prst="rect">
             <a:avLst/>
@@ -4615,11 +4714,11 @@
                 <a:spcPct val="150000"/>
               </a:lnSpc>
               <a:spcAft>
-                <a:spcPts val="600"/>
+                <a:spcPts val="800"/>
               </a:spcAft>
             </a:pPr>
             <a:r>
-              <a:rPr sz="1600" b="0">
+              <a:rPr sz="1400" b="0">
                 <a:solidFill>
                   <a:srgbClr val="1C2A33"/>
                 </a:solidFill>
@@ -4630,43 +4729,77 @@
               <a:t>《林教头风雪山神庙》是《水浒传》经典回目。写林冲从「逆来顺受」到「逼上梁山」：遭高俅陷害、发配草料场、险被烧死，终在山神庙识破阴谋，手刃仇人。风雪环境是推动情节与性格转变的关键。</a:t>
             </a:r>
           </a:p>
-        </p:txBody>
-      </p:sp>
-      <p:pic>
-        <p:nvPicPr>
-          <p:cNvPr id="6" name="Picture 5" descr="typewriter.jpg"/>
-          <p:cNvPicPr>
-            <a:picLocks noChangeAspect="1"/>
-          </p:cNvPicPr>
-          <p:nvPr/>
-        </p:nvPicPr>
-        <p:blipFill>
-          <a:blip r:embed="rId2"/>
-          <a:srcRect l="5860" r="5860"/>
-          <a:stretch>
-            <a:fillRect/>
-          </a:stretch>
-        </p:blipFill>
-        <p:spPr>
-          <a:xfrm>
-            <a:off x="8046720" y="1508760"/>
-            <a:ext cx="4114800" cy="3108960"/>
-          </a:xfrm>
-          <a:prstGeom prst="rect">
-            <a:avLst/>
-          </a:prstGeom>
-        </p:spPr>
-      </p:pic>
-      <p:sp>
-        <p:nvSpPr>
-          <p:cNvPr id="7" name="TextBox 6"/>
+          <a:p>
+            <a:pPr algn="l">
+              <a:lnSpc>
+                <a:spcPct val="150000"/>
+              </a:lnSpc>
+            </a:pPr>
+            <a:r>
+              <a:rPr sz="1300" b="0">
+                <a:solidFill>
+                  <a:srgbClr val="6B6258"/>
+                </a:solidFill>
+                <a:latin typeface="楷体"/>
+                <a:ea typeface="楷体"/>
+                <a:cs typeface="楷体"/>
+              </a:rPr>
+              <a:t>本单元《文学阅读与写作（小说）》：文学阅读与写作（小说）/ 实用性阅读与交流。</a:t>
+            </a:r>
+          </a:p>
+        </p:txBody>
+      </p:sp>
+      <p:sp>
+        <p:nvSpPr>
+          <p:cNvPr id="8" name="Rounded Rectangle 7"/>
+          <p:cNvSpPr/>
+          <p:nvPr/>
+        </p:nvSpPr>
+        <p:spPr>
+          <a:xfrm>
+            <a:off x="6324447" y="1783080"/>
+            <a:ext cx="5227167" cy="4480560"/>
+          </a:xfrm>
+          <a:prstGeom prst="roundRect">
+            <a:avLst/>
+          </a:prstGeom>
+          <a:solidFill>
+            <a:srgbClr val="1C2A33"/>
+          </a:solidFill>
+          <a:effectLst/>
+        </p:spPr>
+        <p:style>
+          <a:lnRef idx="1">
+            <a:schemeClr val="accent1"/>
+          </a:lnRef>
+          <a:fillRef idx="3">
+            <a:schemeClr val="accent1"/>
+          </a:fillRef>
+          <a:effectRef idx="2">
+            <a:schemeClr val="accent1"/>
+          </a:effectRef>
+          <a:fontRef idx="minor">
+            <a:schemeClr val="lt1"/>
+          </a:fontRef>
+        </p:style>
+        <p:txBody>
+          <a:bodyPr rtlCol="0" anchor="ctr"/>
+          <a:lstStyle/>
+          <a:p>
+            <a:pPr algn="ctr"/>
+          </a:p>
+        </p:txBody>
+      </p:sp>
+      <p:sp>
+        <p:nvSpPr>
+          <p:cNvPr id="9" name="TextBox 8"/>
           <p:cNvSpPr txBox="1"/>
           <p:nvPr/>
         </p:nvSpPr>
         <p:spPr>
           <a:xfrm>
-            <a:off x="8046720" y="4663440"/>
-            <a:ext cx="4114800" cy="365760"/>
+            <a:off x="6598767" y="1965960"/>
+            <a:ext cx="4678527" cy="457200"/>
           </a:xfrm>
           <a:prstGeom prst="rect">
             <a:avLst/>
@@ -4679,24 +4812,131 @@
           </a:bodyPr>
           <a:lstStyle/>
           <a:p>
-            <a:pPr algn="ctr"/>
+            <a:pPr algn="l"/>
+            <a:r>
+              <a:rPr sz="1600" b="1">
+                <a:solidFill>
+                  <a:srgbClr val="C8A86B"/>
+                </a:solidFill>
+                <a:latin typeface="楷体"/>
+                <a:ea typeface="楷体"/>
+                <a:cs typeface="楷体"/>
+              </a:rPr>
+              <a:t>权威来源</a:t>
+            </a:r>
+          </a:p>
+        </p:txBody>
+      </p:sp>
+      <p:sp>
+        <p:nvSpPr>
+          <p:cNvPr id="10" name="TextBox 9"/>
+          <p:cNvSpPr txBox="1"/>
+          <p:nvPr/>
+        </p:nvSpPr>
+        <p:spPr>
+          <a:xfrm>
+            <a:off x="6598767" y="2514599"/>
+            <a:ext cx="4678527" cy="3657600"/>
+          </a:xfrm>
+          <a:prstGeom prst="rect">
+            <a:avLst/>
+          </a:prstGeom>
+          <a:noFill/>
+        </p:spPr>
+        <p:txBody>
+          <a:bodyPr wrap="square" anchor="t" lIns="0" rIns="0" tIns="0" bIns="0">
+            <a:spAutoFit/>
+          </a:bodyPr>
+          <a:lstStyle/>
+          <a:p>
+            <a:pPr algn="l">
+              <a:lnSpc>
+                <a:spcPct val="145000"/>
+              </a:lnSpc>
+              <a:spcAft>
+                <a:spcPts val="800"/>
+              </a:spcAft>
+            </a:pPr>
+            <a:r>
+              <a:rPr sz="1250" b="0">
+                <a:solidFill>
+                  <a:srgbClr val="FFFFFF"/>
+                </a:solidFill>
+                <a:latin typeface="楷体"/>
+                <a:ea typeface="楷体"/>
+                <a:cs typeface="楷体"/>
+              </a:rPr>
+              <a:t>《林教头风雪山神庙》「风雪」描写赏析：自然风雪推动情节、烘托人物，揭示「官逼民反」</a:t>
+            </a:r>
+          </a:p>
+          <a:p>
+            <a:pPr algn="l">
+              <a:lnSpc>
+                <a:spcPct val="145000"/>
+              </a:lnSpc>
+              <a:spcAft>
+                <a:spcPts val="800"/>
+              </a:spcAft>
+            </a:pPr>
+            <a:r>
+              <a:rPr sz="1250" b="0">
+                <a:solidFill>
+                  <a:srgbClr val="FFFFFF"/>
+                </a:solidFill>
+                <a:latin typeface="楷体"/>
+                <a:ea typeface="楷体"/>
+                <a:cs typeface="楷体"/>
+              </a:rPr>
+              <a:t>雷珊珊《品风雪妙笔 析环境深意》合格课：风雪四重作用与双层象征</a:t>
+            </a:r>
+          </a:p>
+          <a:p>
+            <a:pPr algn="l">
+              <a:lnSpc>
+                <a:spcPct val="145000"/>
+              </a:lnSpc>
+              <a:spcAft>
+                <a:spcPts val="800"/>
+              </a:spcAft>
+            </a:pPr>
+            <a:r>
+              <a:rPr sz="1250" b="0">
+                <a:solidFill>
+                  <a:srgbClr val="FFFFFF"/>
+                </a:solidFill>
+                <a:latin typeface="楷体"/>
+                <a:ea typeface="楷体"/>
+                <a:cs typeface="楷体"/>
+              </a:rPr>
+              <a:t>瑞文网教案：「紧」字渲染紧张气氛，为情节做铺垫</a:t>
+            </a:r>
+          </a:p>
+          <a:p>
+            <a:pPr algn="l">
+              <a:lnSpc>
+                <a:spcPct val="140000"/>
+              </a:lnSpc>
+              <a:spcBef>
+                <a:spcPts val="600"/>
+              </a:spcBef>
+            </a:pPr>
             <a:r>
               <a:rPr sz="1100" b="0">
                 <a:solidFill>
-                  <a:srgbClr val="6B6258"/>
+                  <a:srgbClr val="E7DFD2"/>
                 </a:solidFill>
                 <a:latin typeface="微软雅黑"/>
                 <a:ea typeface="微软雅黑"/>
                 <a:cs typeface="微软雅黑"/>
               </a:rPr>
-              <a:t>资料图（自由授权，复用 typewriter.jpg）</a:t>
-            </a:r>
-          </a:p>
-        </p:txBody>
-      </p:sp>
-      <p:sp>
-        <p:nvSpPr>
-          <p:cNvPr id="8" name="TextBox 7"/>
+              <a:t>本课件未使用无关配图，画面以学科色块呈现。</a:t>
+            </a:r>
+          </a:p>
+        </p:txBody>
+      </p:sp>
+      <p:sp>
+        <p:nvSpPr>
+          <p:cNvPr id="11" name="TextBox 10"/>
           <p:cNvSpPr txBox="1"/>
           <p:nvPr/>
         </p:nvSpPr>
@@ -4829,7 +5069,7 @@
                 <a:ea typeface="微软雅黑"/>
                 <a:cs typeface="微软雅黑"/>
               </a:rPr>
-              <a:t>学习重点</a:t>
+              <a:t>重点</a:t>
             </a:r>
           </a:p>
         </p:txBody>
@@ -4880,14 +5120,51 @@
       </p:sp>
       <p:sp>
         <p:nvSpPr>
-          <p:cNvPr id="5" name="Rounded Rectangle 4"/>
+          <p:cNvPr id="5" name="TextBox 4"/>
+          <p:cNvSpPr txBox="1"/>
+          <p:nvPr/>
+        </p:nvSpPr>
+        <p:spPr>
+          <a:xfrm>
+            <a:off x="640080" y="1325880"/>
+            <a:ext cx="10058400" cy="548640"/>
+          </a:xfrm>
+          <a:prstGeom prst="rect">
+            <a:avLst/>
+          </a:prstGeom>
+          <a:noFill/>
+        </p:spPr>
+        <p:txBody>
+          <a:bodyPr wrap="square" anchor="t" lIns="0" rIns="0" tIns="0" bIns="0">
+            <a:spAutoFit/>
+          </a:bodyPr>
+          <a:lstStyle/>
+          <a:p>
+            <a:pPr algn="l"/>
+            <a:r>
+              <a:rPr sz="2800" b="1">
+                <a:solidFill>
+                  <a:srgbClr val="1C2A33"/>
+                </a:solidFill>
+                <a:latin typeface="楷体"/>
+                <a:ea typeface="楷体"/>
+                <a:cs typeface="楷体"/>
+              </a:rPr>
+              <a:t>本课重点</a:t>
+            </a:r>
+          </a:p>
+        </p:txBody>
+      </p:sp>
+      <p:sp>
+        <p:nvSpPr>
+          <p:cNvPr id="6" name="Rounded Rectangle 5"/>
           <p:cNvSpPr/>
           <p:nvPr/>
         </p:nvSpPr>
         <p:spPr>
           <a:xfrm>
-            <a:off x="640080" y="1371600"/>
-            <a:ext cx="10911535" cy="1597152"/>
+            <a:off x="640080" y="2194560"/>
+            <a:ext cx="3393338" cy="3931920"/>
           </a:xfrm>
           <a:prstGeom prst="roundRect">
             <a:avLst/>
@@ -4895,7 +5172,417 @@
           <a:solidFill>
             <a:srgbClr val="FFFFFF"/>
           </a:solidFill>
-          <a:ln w="22860">
+          <a:ln w="20320">
+            <a:solidFill>
+              <a:srgbClr val="B23A2A"/>
+            </a:solidFill>
+          </a:ln>
+          <a:effectLst/>
+        </p:spPr>
+        <p:style>
+          <a:lnRef idx="1">
+            <a:schemeClr val="accent1"/>
+          </a:lnRef>
+          <a:fillRef idx="3">
+            <a:schemeClr val="accent1"/>
+          </a:fillRef>
+          <a:effectRef idx="2">
+            <a:schemeClr val="accent1"/>
+          </a:effectRef>
+          <a:fontRef idx="minor">
+            <a:schemeClr val="lt1"/>
+          </a:fontRef>
+        </p:style>
+        <p:txBody>
+          <a:bodyPr rtlCol="0" anchor="ctr"/>
+          <a:lstStyle/>
+          <a:p>
+            <a:pPr algn="ctr"/>
+          </a:p>
+        </p:txBody>
+      </p:sp>
+      <p:sp>
+        <p:nvSpPr>
+          <p:cNvPr id="7" name="Oval 6"/>
+          <p:cNvSpPr/>
+          <p:nvPr/>
+        </p:nvSpPr>
+        <p:spPr>
+          <a:xfrm>
+            <a:off x="868680" y="2423160"/>
+            <a:ext cx="548640" cy="548640"/>
+          </a:xfrm>
+          <a:prstGeom prst="ellipse">
+            <a:avLst/>
+          </a:prstGeom>
+          <a:solidFill>
+            <a:srgbClr val="B23A2A"/>
+          </a:solidFill>
+          <a:ln>
+            <a:noFill/>
+          </a:ln>
+          <a:effectLst/>
+        </p:spPr>
+        <p:style>
+          <a:lnRef idx="1">
+            <a:schemeClr val="accent1"/>
+          </a:lnRef>
+          <a:fillRef idx="3">
+            <a:schemeClr val="accent1"/>
+          </a:fillRef>
+          <a:effectRef idx="2">
+            <a:schemeClr val="accent1"/>
+          </a:effectRef>
+          <a:fontRef idx="minor">
+            <a:schemeClr val="lt1"/>
+          </a:fontRef>
+        </p:style>
+        <p:txBody>
+          <a:bodyPr rtlCol="0" anchor="ctr"/>
+          <a:lstStyle/>
+          <a:p>
+            <a:pPr algn="ctr"/>
+          </a:p>
+        </p:txBody>
+      </p:sp>
+      <p:sp>
+        <p:nvSpPr>
+          <p:cNvPr id="8" name="TextBox 7"/>
+          <p:cNvSpPr txBox="1"/>
+          <p:nvPr/>
+        </p:nvSpPr>
+        <p:spPr>
+          <a:xfrm>
+            <a:off x="868680" y="2487168"/>
+            <a:ext cx="548640" cy="411480"/>
+          </a:xfrm>
+          <a:prstGeom prst="rect">
+            <a:avLst/>
+          </a:prstGeom>
+          <a:noFill/>
+        </p:spPr>
+        <p:txBody>
+          <a:bodyPr wrap="square" anchor="t" lIns="0" rIns="0" tIns="0" bIns="0">
+            <a:spAutoFit/>
+          </a:bodyPr>
+          <a:lstStyle/>
+          <a:p>
+            <a:pPr algn="ctr"/>
+            <a:r>
+              <a:rPr sz="2000" b="1">
+                <a:solidFill>
+                  <a:srgbClr val="FFFFFF"/>
+                </a:solidFill>
+                <a:latin typeface="微软雅黑"/>
+                <a:ea typeface="微软雅黑"/>
+                <a:cs typeface="微软雅黑"/>
+              </a:rPr>
+              <a:t>1</a:t>
+            </a:r>
+          </a:p>
+        </p:txBody>
+      </p:sp>
+      <p:sp>
+        <p:nvSpPr>
+          <p:cNvPr id="9" name="TextBox 8"/>
+          <p:cNvSpPr txBox="1"/>
+          <p:nvPr/>
+        </p:nvSpPr>
+        <p:spPr>
+          <a:xfrm>
+            <a:off x="1554480" y="2441448"/>
+            <a:ext cx="2296058" cy="640080"/>
+          </a:xfrm>
+          <a:prstGeom prst="rect">
+            <a:avLst/>
+          </a:prstGeom>
+          <a:noFill/>
+        </p:spPr>
+        <p:txBody>
+          <a:bodyPr wrap="square" anchor="t" lIns="0" rIns="0" tIns="0" bIns="0">
+            <a:spAutoFit/>
+          </a:bodyPr>
+          <a:lstStyle/>
+          <a:p>
+            <a:pPr algn="l"/>
+            <a:r>
+              <a:rPr sz="1400" b="1">
+                <a:solidFill>
+                  <a:srgbClr val="6B6258"/>
+                </a:solidFill>
+                <a:latin typeface="楷体"/>
+                <a:ea typeface="楷体"/>
+                <a:cs typeface="楷体"/>
+              </a:rPr>
+              <a:t>要点</a:t>
+            </a:r>
+          </a:p>
+        </p:txBody>
+      </p:sp>
+      <p:sp>
+        <p:nvSpPr>
+          <p:cNvPr id="10" name="TextBox 9"/>
+          <p:cNvSpPr txBox="1"/>
+          <p:nvPr/>
+        </p:nvSpPr>
+        <p:spPr>
+          <a:xfrm>
+            <a:off x="914400" y="3200400"/>
+            <a:ext cx="2844698" cy="2743200"/>
+          </a:xfrm>
+          <a:prstGeom prst="rect">
+            <a:avLst/>
+          </a:prstGeom>
+          <a:noFill/>
+        </p:spPr>
+        <p:txBody>
+          <a:bodyPr wrap="square" anchor="t" lIns="0" rIns="0" tIns="0" bIns="0">
+            <a:spAutoFit/>
+          </a:bodyPr>
+          <a:lstStyle/>
+          <a:p>
+            <a:pPr algn="l">
+              <a:lnSpc>
+                <a:spcPct val="155000"/>
+              </a:lnSpc>
+            </a:pPr>
+            <a:r>
+              <a:rPr sz="1450" b="0">
+                <a:solidFill>
+                  <a:srgbClr val="1C2A33"/>
+                </a:solidFill>
+                <a:latin typeface="楷体"/>
+                <a:ea typeface="楷体"/>
+                <a:cs typeface="楷体"/>
+              </a:rPr>
+              <a:t>转变：忍(发配)→疑(去买刀)→忍(草料场)→反(山神庙手刃)。</a:t>
+            </a:r>
+          </a:p>
+        </p:txBody>
+      </p:sp>
+      <p:sp>
+        <p:nvSpPr>
+          <p:cNvPr id="11" name="Rounded Rectangle 10"/>
+          <p:cNvSpPr/>
+          <p:nvPr/>
+        </p:nvSpPr>
+        <p:spPr>
+          <a:xfrm>
+            <a:off x="4399178" y="2194560"/>
+            <a:ext cx="3393338" cy="3931920"/>
+          </a:xfrm>
+          <a:prstGeom prst="roundRect">
+            <a:avLst/>
+          </a:prstGeom>
+          <a:solidFill>
+            <a:srgbClr val="FFFFFF"/>
+          </a:solidFill>
+          <a:ln w="20320">
+            <a:solidFill>
+              <a:srgbClr val="2E7D6B"/>
+            </a:solidFill>
+          </a:ln>
+          <a:effectLst/>
+        </p:spPr>
+        <p:style>
+          <a:lnRef idx="1">
+            <a:schemeClr val="accent1"/>
+          </a:lnRef>
+          <a:fillRef idx="3">
+            <a:schemeClr val="accent1"/>
+          </a:fillRef>
+          <a:effectRef idx="2">
+            <a:schemeClr val="accent1"/>
+          </a:effectRef>
+          <a:fontRef idx="minor">
+            <a:schemeClr val="lt1"/>
+          </a:fontRef>
+        </p:style>
+        <p:txBody>
+          <a:bodyPr rtlCol="0" anchor="ctr"/>
+          <a:lstStyle/>
+          <a:p>
+            <a:pPr algn="ctr"/>
+          </a:p>
+        </p:txBody>
+      </p:sp>
+      <p:sp>
+        <p:nvSpPr>
+          <p:cNvPr id="12" name="Oval 11"/>
+          <p:cNvSpPr/>
+          <p:nvPr/>
+        </p:nvSpPr>
+        <p:spPr>
+          <a:xfrm>
+            <a:off x="4627778" y="2423160"/>
+            <a:ext cx="548640" cy="548640"/>
+          </a:xfrm>
+          <a:prstGeom prst="ellipse">
+            <a:avLst/>
+          </a:prstGeom>
+          <a:solidFill>
+            <a:srgbClr val="2E7D6B"/>
+          </a:solidFill>
+          <a:ln>
+            <a:noFill/>
+          </a:ln>
+          <a:effectLst/>
+        </p:spPr>
+        <p:style>
+          <a:lnRef idx="1">
+            <a:schemeClr val="accent1"/>
+          </a:lnRef>
+          <a:fillRef idx="3">
+            <a:schemeClr val="accent1"/>
+          </a:fillRef>
+          <a:effectRef idx="2">
+            <a:schemeClr val="accent1"/>
+          </a:effectRef>
+          <a:fontRef idx="minor">
+            <a:schemeClr val="lt1"/>
+          </a:fontRef>
+        </p:style>
+        <p:txBody>
+          <a:bodyPr rtlCol="0" anchor="ctr"/>
+          <a:lstStyle/>
+          <a:p>
+            <a:pPr algn="ctr"/>
+          </a:p>
+        </p:txBody>
+      </p:sp>
+      <p:sp>
+        <p:nvSpPr>
+          <p:cNvPr id="13" name="TextBox 12"/>
+          <p:cNvSpPr txBox="1"/>
+          <p:nvPr/>
+        </p:nvSpPr>
+        <p:spPr>
+          <a:xfrm>
+            <a:off x="4627778" y="2487168"/>
+            <a:ext cx="548640" cy="411480"/>
+          </a:xfrm>
+          <a:prstGeom prst="rect">
+            <a:avLst/>
+          </a:prstGeom>
+          <a:noFill/>
+        </p:spPr>
+        <p:txBody>
+          <a:bodyPr wrap="square" anchor="t" lIns="0" rIns="0" tIns="0" bIns="0">
+            <a:spAutoFit/>
+          </a:bodyPr>
+          <a:lstStyle/>
+          <a:p>
+            <a:pPr algn="ctr"/>
+            <a:r>
+              <a:rPr sz="2000" b="1">
+                <a:solidFill>
+                  <a:srgbClr val="FFFFFF"/>
+                </a:solidFill>
+                <a:latin typeface="微软雅黑"/>
+                <a:ea typeface="微软雅黑"/>
+                <a:cs typeface="微软雅黑"/>
+              </a:rPr>
+              <a:t>2</a:t>
+            </a:r>
+          </a:p>
+        </p:txBody>
+      </p:sp>
+      <p:sp>
+        <p:nvSpPr>
+          <p:cNvPr id="14" name="TextBox 13"/>
+          <p:cNvSpPr txBox="1"/>
+          <p:nvPr/>
+        </p:nvSpPr>
+        <p:spPr>
+          <a:xfrm>
+            <a:off x="5313578" y="2441448"/>
+            <a:ext cx="2296058" cy="640080"/>
+          </a:xfrm>
+          <a:prstGeom prst="rect">
+            <a:avLst/>
+          </a:prstGeom>
+          <a:noFill/>
+        </p:spPr>
+        <p:txBody>
+          <a:bodyPr wrap="square" anchor="t" lIns="0" rIns="0" tIns="0" bIns="0">
+            <a:spAutoFit/>
+          </a:bodyPr>
+          <a:lstStyle/>
+          <a:p>
+            <a:pPr algn="l"/>
+            <a:r>
+              <a:rPr sz="1400" b="1">
+                <a:solidFill>
+                  <a:srgbClr val="6B6258"/>
+                </a:solidFill>
+                <a:latin typeface="楷体"/>
+                <a:ea typeface="楷体"/>
+                <a:cs typeface="楷体"/>
+              </a:rPr>
+              <a:t>要点</a:t>
+            </a:r>
+          </a:p>
+        </p:txBody>
+      </p:sp>
+      <p:sp>
+        <p:nvSpPr>
+          <p:cNvPr id="15" name="TextBox 14"/>
+          <p:cNvSpPr txBox="1"/>
+          <p:nvPr/>
+        </p:nvSpPr>
+        <p:spPr>
+          <a:xfrm>
+            <a:off x="4673498" y="3200400"/>
+            <a:ext cx="2844698" cy="2743200"/>
+          </a:xfrm>
+          <a:prstGeom prst="rect">
+            <a:avLst/>
+          </a:prstGeom>
+          <a:noFill/>
+        </p:spPr>
+        <p:txBody>
+          <a:bodyPr wrap="square" anchor="t" lIns="0" rIns="0" tIns="0" bIns="0">
+            <a:spAutoFit/>
+          </a:bodyPr>
+          <a:lstStyle/>
+          <a:p>
+            <a:pPr algn="l">
+              <a:lnSpc>
+                <a:spcPct val="155000"/>
+              </a:lnSpc>
+            </a:pPr>
+            <a:r>
+              <a:rPr sz="1450" b="0">
+                <a:solidFill>
+                  <a:srgbClr val="1C2A33"/>
+                </a:solidFill>
+                <a:latin typeface="楷体"/>
+                <a:ea typeface="楷体"/>
+                <a:cs typeface="楷体"/>
+              </a:rPr>
+              <a:t>风雪：推动情节(压塌草厅→避庙)、象征逼压。</a:t>
+            </a:r>
+          </a:p>
+        </p:txBody>
+      </p:sp>
+      <p:sp>
+        <p:nvSpPr>
+          <p:cNvPr id="16" name="Rounded Rectangle 15"/>
+          <p:cNvSpPr/>
+          <p:nvPr/>
+        </p:nvSpPr>
+        <p:spPr>
+          <a:xfrm>
+            <a:off x="8158276" y="2194560"/>
+            <a:ext cx="3393338" cy="3931920"/>
+          </a:xfrm>
+          <a:prstGeom prst="roundRect">
+            <a:avLst/>
+          </a:prstGeom>
+          <a:solidFill>
+            <a:srgbClr val="FFFFFF"/>
+          </a:solidFill>
+          <a:ln w="20320">
             <a:solidFill>
               <a:srgbClr val="C8A86B"/>
             </a:solidFill>
@@ -4926,107 +5613,23 @@
       </p:sp>
       <p:sp>
         <p:nvSpPr>
-          <p:cNvPr id="6" name="TextBox 5"/>
-          <p:cNvSpPr txBox="1"/>
-          <p:nvPr/>
-        </p:nvSpPr>
-        <p:spPr>
-          <a:xfrm>
-            <a:off x="1371600" y="1481328"/>
-            <a:ext cx="9997135" cy="457200"/>
-          </a:xfrm>
-          <a:prstGeom prst="rect">
-            <a:avLst/>
-          </a:prstGeom>
-          <a:noFill/>
-        </p:spPr>
-        <p:txBody>
-          <a:bodyPr wrap="square" anchor="t" lIns="0" rIns="0" tIns="0" bIns="0">
-            <a:spAutoFit/>
-          </a:bodyPr>
-          <a:lstStyle/>
-          <a:p>
-            <a:pPr algn="l">
-              <a:lnSpc>
-                <a:spcPct val="110000"/>
-              </a:lnSpc>
-            </a:pPr>
-            <a:r>
-              <a:rPr sz="1600" b="1">
-                <a:solidFill>
-                  <a:srgbClr val="1C2A33"/>
-                </a:solidFill>
-                <a:latin typeface="微软雅黑"/>
-                <a:ea typeface="微软雅黑"/>
-                <a:cs typeface="微软雅黑"/>
-              </a:rPr>
-              <a:t/>
-            </a:r>
-          </a:p>
-        </p:txBody>
-      </p:sp>
-      <p:sp>
-        <p:nvSpPr>
-          <p:cNvPr id="7" name="TextBox 6"/>
-          <p:cNvSpPr txBox="1"/>
-          <p:nvPr/>
-        </p:nvSpPr>
-        <p:spPr>
-          <a:xfrm>
-            <a:off x="1371600" y="1920240"/>
-            <a:ext cx="9997135" cy="957072"/>
-          </a:xfrm>
-          <a:prstGeom prst="rect">
-            <a:avLst/>
-          </a:prstGeom>
-          <a:noFill/>
-        </p:spPr>
-        <p:txBody>
-          <a:bodyPr wrap="square" anchor="t" lIns="0" rIns="0" tIns="0" bIns="0">
-            <a:spAutoFit/>
-          </a:bodyPr>
-          <a:lstStyle/>
-          <a:p>
-            <a:pPr algn="l">
-              <a:lnSpc>
-                <a:spcPct val="128000"/>
-              </a:lnSpc>
-            </a:pPr>
-            <a:r>
-              <a:rPr sz="1300" b="0">
-                <a:solidFill>
-                  <a:srgbClr val="1C2A33"/>
-                </a:solidFill>
-                <a:latin typeface="楷体"/>
-                <a:ea typeface="楷体"/>
-                <a:cs typeface="楷体"/>
-              </a:rPr>
-              <a:t>① 转变：忍(发配)→疑(去买刀)→忍(草料场)→反(山神庙手刃)。</a:t>
-            </a:r>
-          </a:p>
-        </p:txBody>
-      </p:sp>
-      <p:sp>
-        <p:nvSpPr>
-          <p:cNvPr id="8" name="Rounded Rectangle 7"/>
+          <p:cNvPr id="17" name="Oval 16"/>
           <p:cNvSpPr/>
           <p:nvPr/>
         </p:nvSpPr>
         <p:spPr>
           <a:xfrm>
-            <a:off x="640080" y="3078480"/>
-            <a:ext cx="10911535" cy="1597152"/>
-          </a:xfrm>
-          <a:prstGeom prst="roundRect">
+            <a:off x="8386876" y="2423160"/>
+            <a:ext cx="548640" cy="548640"/>
+          </a:xfrm>
+          <a:prstGeom prst="ellipse">
             <a:avLst/>
           </a:prstGeom>
           <a:solidFill>
-            <a:srgbClr val="FFFFFF"/>
+            <a:srgbClr val="C8A86B"/>
           </a:solidFill>
-          <a:ln w="22860">
-            <a:solidFill>
-              <a:srgbClr val="C8A86B"/>
-            </a:solidFill>
+          <a:ln>
+            <a:noFill/>
           </a:ln>
           <a:effectLst/>
         </p:spPr>
@@ -5054,14 +5657,14 @@
       </p:sp>
       <p:sp>
         <p:nvSpPr>
-          <p:cNvPr id="9" name="TextBox 8"/>
+          <p:cNvPr id="18" name="TextBox 17"/>
           <p:cNvSpPr txBox="1"/>
           <p:nvPr/>
         </p:nvSpPr>
         <p:spPr>
           <a:xfrm>
-            <a:off x="1371600" y="3188208"/>
-            <a:ext cx="9997135" cy="457200"/>
+            <a:off x="8386876" y="2487168"/>
+            <a:ext cx="548640" cy="411480"/>
           </a:xfrm>
           <a:prstGeom prst="rect">
             <a:avLst/>
@@ -5074,35 +5677,31 @@
           </a:bodyPr>
           <a:lstStyle/>
           <a:p>
-            <a:pPr algn="l">
-              <a:lnSpc>
-                <a:spcPct val="110000"/>
-              </a:lnSpc>
-            </a:pPr>
-            <a:r>
-              <a:rPr sz="1600" b="1">
-                <a:solidFill>
-                  <a:srgbClr val="1C2A33"/>
+            <a:pPr algn="ctr"/>
+            <a:r>
+              <a:rPr sz="2000" b="1">
+                <a:solidFill>
+                  <a:srgbClr val="FFFFFF"/>
                 </a:solidFill>
                 <a:latin typeface="微软雅黑"/>
                 <a:ea typeface="微软雅黑"/>
                 <a:cs typeface="微软雅黑"/>
               </a:rPr>
-              <a:t/>
-            </a:r>
-          </a:p>
-        </p:txBody>
-      </p:sp>
-      <p:sp>
-        <p:nvSpPr>
-          <p:cNvPr id="10" name="TextBox 9"/>
+              <a:t>3</a:t>
+            </a:r>
+          </a:p>
+        </p:txBody>
+      </p:sp>
+      <p:sp>
+        <p:nvSpPr>
+          <p:cNvPr id="19" name="TextBox 18"/>
           <p:cNvSpPr txBox="1"/>
           <p:nvPr/>
         </p:nvSpPr>
         <p:spPr>
           <a:xfrm>
-            <a:off x="1371600" y="3627120"/>
-            <a:ext cx="9997135" cy="957072"/>
+            <a:off x="9072676" y="2441448"/>
+            <a:ext cx="2296058" cy="640080"/>
           </a:xfrm>
           <a:prstGeom prst="rect">
             <a:avLst/>
@@ -5115,81 +5714,31 @@
           </a:bodyPr>
           <a:lstStyle/>
           <a:p>
-            <a:pPr algn="l">
-              <a:lnSpc>
-                <a:spcPct val="128000"/>
-              </a:lnSpc>
-            </a:pPr>
-            <a:r>
-              <a:rPr sz="1300" b="0">
-                <a:solidFill>
-                  <a:srgbClr val="1C2A33"/>
+            <a:pPr algn="l"/>
+            <a:r>
+              <a:rPr sz="1400" b="1">
+                <a:solidFill>
+                  <a:srgbClr val="6B6258"/>
                 </a:solidFill>
                 <a:latin typeface="楷体"/>
                 <a:ea typeface="楷体"/>
                 <a:cs typeface="楷体"/>
               </a:rPr>
-              <a:t>② 风雪：推动情节(压塌草厅→避庙)、象征逼压。</a:t>
-            </a:r>
-          </a:p>
-        </p:txBody>
-      </p:sp>
-      <p:sp>
-        <p:nvSpPr>
-          <p:cNvPr id="11" name="Rounded Rectangle 10"/>
-          <p:cNvSpPr/>
-          <p:nvPr/>
-        </p:nvSpPr>
-        <p:spPr>
-          <a:xfrm>
-            <a:off x="640080" y="4785360"/>
-            <a:ext cx="10911535" cy="1597152"/>
-          </a:xfrm>
-          <a:prstGeom prst="roundRect">
-            <a:avLst/>
-          </a:prstGeom>
-          <a:solidFill>
-            <a:srgbClr val="FFFFFF"/>
-          </a:solidFill>
-          <a:ln w="22860">
-            <a:solidFill>
-              <a:srgbClr val="C8A86B"/>
-            </a:solidFill>
-          </a:ln>
-          <a:effectLst/>
-        </p:spPr>
-        <p:style>
-          <a:lnRef idx="1">
-            <a:schemeClr val="accent1"/>
-          </a:lnRef>
-          <a:fillRef idx="3">
-            <a:schemeClr val="accent1"/>
-          </a:fillRef>
-          <a:effectRef idx="2">
-            <a:schemeClr val="accent1"/>
-          </a:effectRef>
-          <a:fontRef idx="minor">
-            <a:schemeClr val="lt1"/>
-          </a:fontRef>
-        </p:style>
-        <p:txBody>
-          <a:bodyPr rtlCol="0" anchor="ctr"/>
-          <a:lstStyle/>
-          <a:p>
-            <a:pPr algn="ctr"/>
-          </a:p>
-        </p:txBody>
-      </p:sp>
-      <p:sp>
-        <p:nvSpPr>
-          <p:cNvPr id="12" name="TextBox 11"/>
+              <a:t>要点</a:t>
+            </a:r>
+          </a:p>
+        </p:txBody>
+      </p:sp>
+      <p:sp>
+        <p:nvSpPr>
+          <p:cNvPr id="20" name="TextBox 19"/>
           <p:cNvSpPr txBox="1"/>
           <p:nvPr/>
         </p:nvSpPr>
         <p:spPr>
           <a:xfrm>
-            <a:off x="1371600" y="4895088"/>
-            <a:ext cx="9997135" cy="457200"/>
+            <a:off x="8432596" y="3200400"/>
+            <a:ext cx="2844698" cy="2743200"/>
           </a:xfrm>
           <a:prstGeom prst="rect">
             <a:avLst/>
@@ -5204,52 +5753,11 @@
           <a:p>
             <a:pPr algn="l">
               <a:lnSpc>
-                <a:spcPct val="110000"/>
+                <a:spcPct val="155000"/>
               </a:lnSpc>
             </a:pPr>
             <a:r>
-              <a:rPr sz="1600" b="1">
-                <a:solidFill>
-                  <a:srgbClr val="1C2A33"/>
-                </a:solidFill>
-                <a:latin typeface="微软雅黑"/>
-                <a:ea typeface="微软雅黑"/>
-                <a:cs typeface="微软雅黑"/>
-              </a:rPr>
-              <a:t/>
-            </a:r>
-          </a:p>
-        </p:txBody>
-      </p:sp>
-      <p:sp>
-        <p:nvSpPr>
-          <p:cNvPr id="13" name="TextBox 12"/>
-          <p:cNvSpPr txBox="1"/>
-          <p:nvPr/>
-        </p:nvSpPr>
-        <p:spPr>
-          <a:xfrm>
-            <a:off x="1371600" y="5334000"/>
-            <a:ext cx="9997135" cy="957072"/>
-          </a:xfrm>
-          <a:prstGeom prst="rect">
-            <a:avLst/>
-          </a:prstGeom>
-          <a:noFill/>
-        </p:spPr>
-        <p:txBody>
-          <a:bodyPr wrap="square" anchor="t" lIns="0" rIns="0" tIns="0" bIns="0">
-            <a:spAutoFit/>
-          </a:bodyPr>
-          <a:lstStyle/>
-          <a:p>
-            <a:pPr algn="l">
-              <a:lnSpc>
-                <a:spcPct val="128000"/>
-              </a:lnSpc>
-            </a:pPr>
-            <a:r>
-              <a:rPr sz="1300" b="0">
+              <a:rPr sz="1450" b="0">
                 <a:solidFill>
                   <a:srgbClr val="1C2A33"/>
                 </a:solidFill>
@@ -5257,14 +5765,14 @@
                 <a:ea typeface="楷体"/>
                 <a:cs typeface="楷体"/>
               </a:rPr>
-              <a:t>③ 主题：官逼民反。</a:t>
-            </a:r>
-          </a:p>
-        </p:txBody>
-      </p:sp>
-      <p:sp>
-        <p:nvSpPr>
-          <p:cNvPr id="14" name="TextBox 13"/>
+              <a:t>主题：官逼民反。</a:t>
+            </a:r>
+          </a:p>
+        </p:txBody>
+      </p:sp>
+      <p:sp>
+        <p:nvSpPr>
+          <p:cNvPr id="21" name="TextBox 20"/>
           <p:cNvSpPr txBox="1"/>
           <p:nvPr/>
         </p:nvSpPr>
@@ -5391,13 +5899,13 @@
             <a:r>
               <a:rPr sz="1300" b="1">
                 <a:solidFill>
-                  <a:srgbClr val="2E7D6B"/>
+                  <a:srgbClr val="B23A2A"/>
                 </a:solidFill>
                 <a:latin typeface="微软雅黑"/>
                 <a:ea typeface="微软雅黑"/>
                 <a:cs typeface="微软雅黑"/>
               </a:rPr>
-              <a:t>学习路径</a:t>
+              <a:t>方法</a:t>
             </a:r>
           </a:p>
         </p:txBody>
@@ -5414,6 +5922,133 @@
             <a:ext cx="822960" cy="30480"/>
           </a:xfrm>
           <a:prstGeom prst="rect">
+            <a:avLst/>
+          </a:prstGeom>
+          <a:solidFill>
+            <a:srgbClr val="B23A2A"/>
+          </a:solidFill>
+          <a:ln>
+            <a:noFill/>
+          </a:ln>
+          <a:effectLst/>
+        </p:spPr>
+        <p:style>
+          <a:lnRef idx="1">
+            <a:schemeClr val="accent1"/>
+          </a:lnRef>
+          <a:fillRef idx="3">
+            <a:schemeClr val="accent1"/>
+          </a:fillRef>
+          <a:effectRef idx="2">
+            <a:schemeClr val="accent1"/>
+          </a:effectRef>
+          <a:fontRef idx="minor">
+            <a:schemeClr val="lt1"/>
+          </a:fontRef>
+        </p:style>
+        <p:txBody>
+          <a:bodyPr rtlCol="0" anchor="ctr"/>
+          <a:lstStyle/>
+          <a:p>
+            <a:pPr algn="ctr"/>
+          </a:p>
+        </p:txBody>
+      </p:sp>
+      <p:sp>
+        <p:nvSpPr>
+          <p:cNvPr id="5" name="TextBox 4"/>
+          <p:cNvSpPr txBox="1"/>
+          <p:nvPr/>
+        </p:nvSpPr>
+        <p:spPr>
+          <a:xfrm>
+            <a:off x="640080" y="1325880"/>
+            <a:ext cx="10058400" cy="548640"/>
+          </a:xfrm>
+          <a:prstGeom prst="rect">
+            <a:avLst/>
+          </a:prstGeom>
+          <a:noFill/>
+        </p:spPr>
+        <p:txBody>
+          <a:bodyPr wrap="square" anchor="t" lIns="0" rIns="0" tIns="0" bIns="0">
+            <a:spAutoFit/>
+          </a:bodyPr>
+          <a:lstStyle/>
+          <a:p>
+            <a:pPr algn="l"/>
+            <a:r>
+              <a:rPr sz="2800" b="1">
+                <a:solidFill>
+                  <a:srgbClr val="1C2A33"/>
+                </a:solidFill>
+                <a:latin typeface="楷体"/>
+                <a:ea typeface="楷体"/>
+                <a:cs typeface="楷体"/>
+              </a:rPr>
+              <a:t>本课方法</a:t>
+            </a:r>
+          </a:p>
+        </p:txBody>
+      </p:sp>
+      <p:sp>
+        <p:nvSpPr>
+          <p:cNvPr id="6" name="Rounded Rectangle 5"/>
+          <p:cNvSpPr/>
+          <p:nvPr/>
+        </p:nvSpPr>
+        <p:spPr>
+          <a:xfrm>
+            <a:off x="640080" y="2194560"/>
+            <a:ext cx="2453563" cy="3931920"/>
+          </a:xfrm>
+          <a:prstGeom prst="roundRect">
+            <a:avLst/>
+          </a:prstGeom>
+          <a:solidFill>
+            <a:srgbClr val="FFFFFF"/>
+          </a:solidFill>
+          <a:ln w="20320">
+            <a:solidFill>
+              <a:srgbClr val="2E7D6B"/>
+            </a:solidFill>
+          </a:ln>
+          <a:effectLst/>
+        </p:spPr>
+        <p:style>
+          <a:lnRef idx="1">
+            <a:schemeClr val="accent1"/>
+          </a:lnRef>
+          <a:fillRef idx="3">
+            <a:schemeClr val="accent1"/>
+          </a:fillRef>
+          <a:effectRef idx="2">
+            <a:schemeClr val="accent1"/>
+          </a:effectRef>
+          <a:fontRef idx="minor">
+            <a:schemeClr val="lt1"/>
+          </a:fontRef>
+        </p:style>
+        <p:txBody>
+          <a:bodyPr rtlCol="0" anchor="ctr"/>
+          <a:lstStyle/>
+          <a:p>
+            <a:pPr algn="ctr"/>
+          </a:p>
+        </p:txBody>
+      </p:sp>
+      <p:sp>
+        <p:nvSpPr>
+          <p:cNvPr id="7" name="Oval 6"/>
+          <p:cNvSpPr/>
+          <p:nvPr/>
+        </p:nvSpPr>
+        <p:spPr>
+          <a:xfrm>
+            <a:off x="822960" y="2395728"/>
+            <a:ext cx="502920" cy="502920"/>
+          </a:xfrm>
+          <a:prstGeom prst="ellipse">
             <a:avLst/>
           </a:prstGeom>
           <a:solidFill>
@@ -5448,14 +6083,92 @@
       </p:sp>
       <p:sp>
         <p:nvSpPr>
-          <p:cNvPr id="5" name="Rounded Rectangle 4"/>
+          <p:cNvPr id="8" name="TextBox 7"/>
+          <p:cNvSpPr txBox="1"/>
+          <p:nvPr/>
+        </p:nvSpPr>
+        <p:spPr>
+          <a:xfrm>
+            <a:off x="822960" y="2450592"/>
+            <a:ext cx="502920" cy="384048"/>
+          </a:xfrm>
+          <a:prstGeom prst="rect">
+            <a:avLst/>
+          </a:prstGeom>
+          <a:noFill/>
+        </p:spPr>
+        <p:txBody>
+          <a:bodyPr wrap="square" anchor="t" lIns="0" rIns="0" tIns="0" bIns="0">
+            <a:spAutoFit/>
+          </a:bodyPr>
+          <a:lstStyle/>
+          <a:p>
+            <a:pPr algn="ctr"/>
+            <a:r>
+              <a:rPr sz="1800" b="1">
+                <a:solidFill>
+                  <a:srgbClr val="FFFFFF"/>
+                </a:solidFill>
+                <a:latin typeface="微软雅黑"/>
+                <a:ea typeface="微软雅黑"/>
+                <a:cs typeface="微软雅黑"/>
+              </a:rPr>
+              <a:t>1</a:t>
+            </a:r>
+          </a:p>
+        </p:txBody>
+      </p:sp>
+      <p:sp>
+        <p:nvSpPr>
+          <p:cNvPr id="9" name="TextBox 8"/>
+          <p:cNvSpPr txBox="1"/>
+          <p:nvPr/>
+        </p:nvSpPr>
+        <p:spPr>
+          <a:xfrm>
+            <a:off x="822960" y="3291840"/>
+            <a:ext cx="2087803" cy="2560320"/>
+          </a:xfrm>
+          <a:prstGeom prst="rect">
+            <a:avLst/>
+          </a:prstGeom>
+          <a:noFill/>
+        </p:spPr>
+        <p:txBody>
+          <a:bodyPr wrap="square" anchor="t" lIns="0" rIns="0" tIns="0" bIns="0">
+            <a:spAutoFit/>
+          </a:bodyPr>
+          <a:lstStyle/>
+          <a:p>
+            <a:pPr algn="ctr">
+              <a:lnSpc>
+                <a:spcPct val="140000"/>
+              </a:lnSpc>
+            </a:pPr>
+            <a:r>
+              <a:rPr sz="1800" b="1">
+                <a:solidFill>
+                  <a:srgbClr val="2E7D6B"/>
+                </a:solidFill>
+                <a:latin typeface="楷体"/>
+                <a:ea typeface="楷体"/>
+                <a:cs typeface="楷体"/>
+              </a:rPr>
+              <a:t>① 性格曲线法。</a:t>
+            </a:r>
+          </a:p>
+        </p:txBody>
+      </p:sp>
+      <p:sp>
+        <p:nvSpPr>
+          <p:cNvPr id="10" name="Rounded Rectangle 9"/>
           <p:cNvSpPr/>
           <p:nvPr/>
         </p:nvSpPr>
         <p:spPr>
           <a:xfrm>
-            <a:off x="640080" y="1371600"/>
-            <a:ext cx="10911535" cy="685800"/>
+            <a:off x="3459403" y="2194560"/>
+            <a:ext cx="2453563" cy="3931920"/>
           </a:xfrm>
           <a:prstGeom prst="roundRect">
             <a:avLst/>
@@ -5463,7 +6176,7 @@
           <a:solidFill>
             <a:srgbClr val="FFFFFF"/>
           </a:solidFill>
-          <a:ln w="22860">
+          <a:ln w="20320">
             <a:solidFill>
               <a:srgbClr val="2E7D6B"/>
             </a:solidFill>
@@ -5494,14 +6207,14 @@
       </p:sp>
       <p:sp>
         <p:nvSpPr>
-          <p:cNvPr id="6" name="Oval 5"/>
+          <p:cNvPr id="11" name="Oval 10"/>
           <p:cNvSpPr/>
           <p:nvPr/>
         </p:nvSpPr>
         <p:spPr>
           <a:xfrm>
-            <a:off x="804672" y="1536192"/>
-            <a:ext cx="457200" cy="457200"/>
+            <a:off x="3642283" y="2395728"/>
+            <a:ext cx="502920" cy="502920"/>
           </a:xfrm>
           <a:prstGeom prst="ellipse">
             <a:avLst/>
@@ -5538,14 +6251,14 @@
       </p:sp>
       <p:sp>
         <p:nvSpPr>
-          <p:cNvPr id="7" name="TextBox 6"/>
+          <p:cNvPr id="12" name="TextBox 11"/>
           <p:cNvSpPr txBox="1"/>
           <p:nvPr/>
         </p:nvSpPr>
         <p:spPr>
           <a:xfrm>
-            <a:off x="804672" y="1591056"/>
-            <a:ext cx="457200" cy="384048"/>
+            <a:off x="3642283" y="2450592"/>
+            <a:ext cx="502920" cy="384048"/>
           </a:xfrm>
           <a:prstGeom prst="rect">
             <a:avLst/>
@@ -5560,7 +6273,7 @@
           <a:p>
             <a:pPr algn="ctr"/>
             <a:r>
-              <a:rPr sz="1600" b="1">
+              <a:rPr sz="1800" b="1">
                 <a:solidFill>
                   <a:srgbClr val="FFFFFF"/>
                 </a:solidFill>
@@ -5568,21 +6281,21 @@
                 <a:ea typeface="微软雅黑"/>
                 <a:cs typeface="微软雅黑"/>
               </a:rPr>
-              <a:t>1</a:t>
-            </a:r>
-          </a:p>
-        </p:txBody>
-      </p:sp>
-      <p:sp>
-        <p:nvSpPr>
-          <p:cNvPr id="8" name="TextBox 7"/>
+              <a:t>2</a:t>
+            </a:r>
+          </a:p>
+        </p:txBody>
+      </p:sp>
+      <p:sp>
+        <p:nvSpPr>
+          <p:cNvPr id="13" name="TextBox 12"/>
           <p:cNvSpPr txBox="1"/>
           <p:nvPr/>
         </p:nvSpPr>
         <p:spPr>
           <a:xfrm>
-            <a:off x="1371600" y="1481328"/>
-            <a:ext cx="9997135" cy="484632"/>
+            <a:off x="3642283" y="3291840"/>
+            <a:ext cx="2087803" cy="2560320"/>
           </a:xfrm>
           <a:prstGeom prst="rect">
             <a:avLst/>
@@ -5595,35 +6308,35 @@
           </a:bodyPr>
           <a:lstStyle/>
           <a:p>
-            <a:pPr algn="l">
+            <a:pPr algn="ctr">
               <a:lnSpc>
-                <a:spcPct val="110000"/>
+                <a:spcPct val="140000"/>
               </a:lnSpc>
             </a:pPr>
             <a:r>
-              <a:rPr sz="1600" b="1">
-                <a:solidFill>
-                  <a:srgbClr val="1C2A33"/>
-                </a:solidFill>
-                <a:latin typeface="微软雅黑"/>
-                <a:ea typeface="微软雅黑"/>
-                <a:cs typeface="微软雅黑"/>
+              <a:rPr sz="1800" b="1">
+                <a:solidFill>
+                  <a:srgbClr val="2E7D6B"/>
+                </a:solidFill>
+                <a:latin typeface="楷体"/>
+                <a:ea typeface="楷体"/>
+                <a:cs typeface="楷体"/>
               </a:rPr>
-              <a:t>Step 1 导入</a:t>
-            </a:r>
-          </a:p>
-        </p:txBody>
-      </p:sp>
-      <p:sp>
-        <p:nvSpPr>
-          <p:cNvPr id="9" name="Rounded Rectangle 8"/>
+              <a:t>② 环境推动力法：风雪。</a:t>
+            </a:r>
+          </a:p>
+        </p:txBody>
+      </p:sp>
+      <p:sp>
+        <p:nvSpPr>
+          <p:cNvPr id="14" name="Rounded Rectangle 13"/>
           <p:cNvSpPr/>
           <p:nvPr/>
         </p:nvSpPr>
         <p:spPr>
           <a:xfrm>
-            <a:off x="640080" y="2194560"/>
-            <a:ext cx="10911535" cy="685800"/>
+            <a:off x="6278727" y="2194560"/>
+            <a:ext cx="2453563" cy="3931920"/>
           </a:xfrm>
           <a:prstGeom prst="roundRect">
             <a:avLst/>
@@ -5631,7 +6344,7 @@
           <a:solidFill>
             <a:srgbClr val="FFFFFF"/>
           </a:solidFill>
-          <a:ln w="22860">
+          <a:ln w="20320">
             <a:solidFill>
               <a:srgbClr val="2E7D6B"/>
             </a:solidFill>
@@ -5662,14 +6375,14 @@
       </p:sp>
       <p:sp>
         <p:nvSpPr>
-          <p:cNvPr id="10" name="Oval 9"/>
+          <p:cNvPr id="15" name="Oval 14"/>
           <p:cNvSpPr/>
           <p:nvPr/>
         </p:nvSpPr>
         <p:spPr>
           <a:xfrm>
-            <a:off x="804672" y="2359152"/>
-            <a:ext cx="457200" cy="457200"/>
+            <a:off x="6461607" y="2395728"/>
+            <a:ext cx="502920" cy="502920"/>
           </a:xfrm>
           <a:prstGeom prst="ellipse">
             <a:avLst/>
@@ -5706,14 +6419,14 @@
       </p:sp>
       <p:sp>
         <p:nvSpPr>
-          <p:cNvPr id="11" name="TextBox 10"/>
+          <p:cNvPr id="16" name="TextBox 15"/>
           <p:cNvSpPr txBox="1"/>
           <p:nvPr/>
         </p:nvSpPr>
         <p:spPr>
           <a:xfrm>
-            <a:off x="804672" y="2414016"/>
-            <a:ext cx="457200" cy="384048"/>
+            <a:off x="6461607" y="2450592"/>
+            <a:ext cx="502920" cy="384048"/>
           </a:xfrm>
           <a:prstGeom prst="rect">
             <a:avLst/>
@@ -5728,7 +6441,7 @@
           <a:p>
             <a:pPr algn="ctr"/>
             <a:r>
-              <a:rPr sz="1600" b="1">
+              <a:rPr sz="1800" b="1">
                 <a:solidFill>
                   <a:srgbClr val="FFFFFF"/>
                 </a:solidFill>
@@ -5736,21 +6449,21 @@
                 <a:ea typeface="微软雅黑"/>
                 <a:cs typeface="微软雅黑"/>
               </a:rPr>
-              <a:t>2</a:t>
-            </a:r>
-          </a:p>
-        </p:txBody>
-      </p:sp>
-      <p:sp>
-        <p:nvSpPr>
-          <p:cNvPr id="12" name="TextBox 11"/>
+              <a:t>3</a:t>
+            </a:r>
+          </a:p>
+        </p:txBody>
+      </p:sp>
+      <p:sp>
+        <p:nvSpPr>
+          <p:cNvPr id="17" name="TextBox 16"/>
           <p:cNvSpPr txBox="1"/>
           <p:nvPr/>
         </p:nvSpPr>
         <p:spPr>
           <a:xfrm>
-            <a:off x="1371600" y="2304288"/>
-            <a:ext cx="9997135" cy="484632"/>
+            <a:off x="6461607" y="3291840"/>
+            <a:ext cx="2087803" cy="2560320"/>
           </a:xfrm>
           <a:prstGeom prst="rect">
             <a:avLst/>
@@ -5763,35 +6476,35 @@
           </a:bodyPr>
           <a:lstStyle/>
           <a:p>
-            <a:pPr algn="l">
+            <a:pPr algn="ctr">
               <a:lnSpc>
-                <a:spcPct val="110000"/>
+                <a:spcPct val="140000"/>
               </a:lnSpc>
             </a:pPr>
             <a:r>
-              <a:rPr sz="1600" b="1">
-                <a:solidFill>
-                  <a:srgbClr val="1C2A33"/>
-                </a:solidFill>
-                <a:latin typeface="微软雅黑"/>
-                <a:ea typeface="微软雅黑"/>
-                <a:cs typeface="微软雅黑"/>
+              <a:rPr sz="1800" b="1">
+                <a:solidFill>
+                  <a:srgbClr val="2E7D6B"/>
+                </a:solidFill>
+                <a:latin typeface="楷体"/>
+                <a:ea typeface="楷体"/>
+                <a:cs typeface="楷体"/>
               </a:rPr>
-              <a:t>Step 2 性格曲线</a:t>
-            </a:r>
-          </a:p>
-        </p:txBody>
-      </p:sp>
-      <p:sp>
-        <p:nvSpPr>
-          <p:cNvPr id="13" name="Rounded Rectangle 12"/>
+              <a:t>③ 细节品读法（火盆/刀）。</a:t>
+            </a:r>
+          </a:p>
+        </p:txBody>
+      </p:sp>
+      <p:sp>
+        <p:nvSpPr>
+          <p:cNvPr id="18" name="Rounded Rectangle 17"/>
           <p:cNvSpPr/>
           <p:nvPr/>
         </p:nvSpPr>
         <p:spPr>
           <a:xfrm>
-            <a:off x="640080" y="3017520"/>
-            <a:ext cx="10911535" cy="685800"/>
+            <a:off x="9098051" y="2194560"/>
+            <a:ext cx="2453563" cy="3931920"/>
           </a:xfrm>
           <a:prstGeom prst="roundRect">
             <a:avLst/>
@@ -5799,7 +6512,7 @@
           <a:solidFill>
             <a:srgbClr val="FFFFFF"/>
           </a:solidFill>
-          <a:ln w="22860">
+          <a:ln w="20320">
             <a:solidFill>
               <a:srgbClr val="2E7D6B"/>
             </a:solidFill>
@@ -5830,14 +6543,14 @@
       </p:sp>
       <p:sp>
         <p:nvSpPr>
-          <p:cNvPr id="14" name="Oval 13"/>
+          <p:cNvPr id="19" name="Oval 18"/>
           <p:cNvSpPr/>
           <p:nvPr/>
         </p:nvSpPr>
         <p:spPr>
           <a:xfrm>
-            <a:off x="804672" y="3182112"/>
-            <a:ext cx="457200" cy="457200"/>
+            <a:off x="9280931" y="2395728"/>
+            <a:ext cx="502920" cy="502920"/>
           </a:xfrm>
           <a:prstGeom prst="ellipse">
             <a:avLst/>
@@ -5874,14 +6587,14 @@
       </p:sp>
       <p:sp>
         <p:nvSpPr>
-          <p:cNvPr id="15" name="TextBox 14"/>
+          <p:cNvPr id="20" name="TextBox 19"/>
           <p:cNvSpPr txBox="1"/>
           <p:nvPr/>
         </p:nvSpPr>
         <p:spPr>
           <a:xfrm>
-            <a:off x="804672" y="3236976"/>
-            <a:ext cx="457200" cy="384048"/>
+            <a:off x="9280931" y="2450592"/>
+            <a:ext cx="502920" cy="384048"/>
           </a:xfrm>
           <a:prstGeom prst="rect">
             <a:avLst/>
@@ -5896,175 +6609,7 @@
           <a:p>
             <a:pPr algn="ctr"/>
             <a:r>
-              <a:rPr sz="1600" b="1">
-                <a:solidFill>
-                  <a:srgbClr val="FFFFFF"/>
-                </a:solidFill>
-                <a:latin typeface="微软雅黑"/>
-                <a:ea typeface="微软雅黑"/>
-                <a:cs typeface="微软雅黑"/>
-              </a:rPr>
-              <a:t>3</a:t>
-            </a:r>
-          </a:p>
-        </p:txBody>
-      </p:sp>
-      <p:sp>
-        <p:nvSpPr>
-          <p:cNvPr id="16" name="TextBox 15"/>
-          <p:cNvSpPr txBox="1"/>
-          <p:nvPr/>
-        </p:nvSpPr>
-        <p:spPr>
-          <a:xfrm>
-            <a:off x="1371600" y="3127248"/>
-            <a:ext cx="9997135" cy="484632"/>
-          </a:xfrm>
-          <a:prstGeom prst="rect">
-            <a:avLst/>
-          </a:prstGeom>
-          <a:noFill/>
-        </p:spPr>
-        <p:txBody>
-          <a:bodyPr wrap="square" anchor="t" lIns="0" rIns="0" tIns="0" bIns="0">
-            <a:spAutoFit/>
-          </a:bodyPr>
-          <a:lstStyle/>
-          <a:p>
-            <a:pPr algn="l">
-              <a:lnSpc>
-                <a:spcPct val="110000"/>
-              </a:lnSpc>
-            </a:pPr>
-            <a:r>
-              <a:rPr sz="1600" b="1">
-                <a:solidFill>
-                  <a:srgbClr val="1C2A33"/>
-                </a:solidFill>
-                <a:latin typeface="微软雅黑"/>
-                <a:ea typeface="微软雅黑"/>
-                <a:cs typeface="微软雅黑"/>
-              </a:rPr>
-              <a:t>Step 3 风雪</a:t>
-            </a:r>
-          </a:p>
-        </p:txBody>
-      </p:sp>
-      <p:sp>
-        <p:nvSpPr>
-          <p:cNvPr id="17" name="Rounded Rectangle 16"/>
-          <p:cNvSpPr/>
-          <p:nvPr/>
-        </p:nvSpPr>
-        <p:spPr>
-          <a:xfrm>
-            <a:off x="640080" y="3840480"/>
-            <a:ext cx="10911535" cy="685800"/>
-          </a:xfrm>
-          <a:prstGeom prst="roundRect">
-            <a:avLst/>
-          </a:prstGeom>
-          <a:solidFill>
-            <a:srgbClr val="FFFFFF"/>
-          </a:solidFill>
-          <a:ln w="22860">
-            <a:solidFill>
-              <a:srgbClr val="2E7D6B"/>
-            </a:solidFill>
-          </a:ln>
-          <a:effectLst/>
-        </p:spPr>
-        <p:style>
-          <a:lnRef idx="1">
-            <a:schemeClr val="accent1"/>
-          </a:lnRef>
-          <a:fillRef idx="3">
-            <a:schemeClr val="accent1"/>
-          </a:fillRef>
-          <a:effectRef idx="2">
-            <a:schemeClr val="accent1"/>
-          </a:effectRef>
-          <a:fontRef idx="minor">
-            <a:schemeClr val="lt1"/>
-          </a:fontRef>
-        </p:style>
-        <p:txBody>
-          <a:bodyPr rtlCol="0" anchor="ctr"/>
-          <a:lstStyle/>
-          <a:p>
-            <a:pPr algn="ctr"/>
-          </a:p>
-        </p:txBody>
-      </p:sp>
-      <p:sp>
-        <p:nvSpPr>
-          <p:cNvPr id="18" name="Oval 17"/>
-          <p:cNvSpPr/>
-          <p:nvPr/>
-        </p:nvSpPr>
-        <p:spPr>
-          <a:xfrm>
-            <a:off x="804672" y="4005072"/>
-            <a:ext cx="457200" cy="457200"/>
-          </a:xfrm>
-          <a:prstGeom prst="ellipse">
-            <a:avLst/>
-          </a:prstGeom>
-          <a:solidFill>
-            <a:srgbClr val="2E7D6B"/>
-          </a:solidFill>
-          <a:ln>
-            <a:noFill/>
-          </a:ln>
-          <a:effectLst/>
-        </p:spPr>
-        <p:style>
-          <a:lnRef idx="1">
-            <a:schemeClr val="accent1"/>
-          </a:lnRef>
-          <a:fillRef idx="3">
-            <a:schemeClr val="accent1"/>
-          </a:fillRef>
-          <a:effectRef idx="2">
-            <a:schemeClr val="accent1"/>
-          </a:effectRef>
-          <a:fontRef idx="minor">
-            <a:schemeClr val="lt1"/>
-          </a:fontRef>
-        </p:style>
-        <p:txBody>
-          <a:bodyPr rtlCol="0" anchor="ctr"/>
-          <a:lstStyle/>
-          <a:p>
-            <a:pPr algn="ctr"/>
-          </a:p>
-        </p:txBody>
-      </p:sp>
-      <p:sp>
-        <p:nvSpPr>
-          <p:cNvPr id="19" name="TextBox 18"/>
-          <p:cNvSpPr txBox="1"/>
-          <p:nvPr/>
-        </p:nvSpPr>
-        <p:spPr>
-          <a:xfrm>
-            <a:off x="804672" y="4059936"/>
-            <a:ext cx="457200" cy="384048"/>
-          </a:xfrm>
-          <a:prstGeom prst="rect">
-            <a:avLst/>
-          </a:prstGeom>
-          <a:noFill/>
-        </p:spPr>
-        <p:txBody>
-          <a:bodyPr wrap="square" anchor="t" lIns="0" rIns="0" tIns="0" bIns="0">
-            <a:spAutoFit/>
-          </a:bodyPr>
-          <a:lstStyle/>
-          <a:p>
-            <a:pPr algn="ctr"/>
-            <a:r>
-              <a:rPr sz="1600" b="1">
+              <a:rPr sz="1800" b="1">
                 <a:solidFill>
                   <a:srgbClr val="FFFFFF"/>
                 </a:solidFill>
@@ -6079,14 +6624,14 @@
       </p:sp>
       <p:sp>
         <p:nvSpPr>
-          <p:cNvPr id="20" name="TextBox 19"/>
+          <p:cNvPr id="21" name="TextBox 20"/>
           <p:cNvSpPr txBox="1"/>
           <p:nvPr/>
         </p:nvSpPr>
         <p:spPr>
           <a:xfrm>
-            <a:off x="1371600" y="3950208"/>
-            <a:ext cx="9997135" cy="484632"/>
+            <a:off x="9280931" y="3291840"/>
+            <a:ext cx="2087803" cy="2560320"/>
           </a:xfrm>
           <a:prstGeom prst="rect">
             <a:avLst/>
@@ -6099,364 +6644,28 @@
           </a:bodyPr>
           <a:lstStyle/>
           <a:p>
-            <a:pPr algn="l">
+            <a:pPr algn="ctr">
               <a:lnSpc>
-                <a:spcPct val="110000"/>
+                <a:spcPct val="140000"/>
               </a:lnSpc>
             </a:pPr>
             <a:r>
-              <a:rPr sz="1600" b="1">
-                <a:solidFill>
-                  <a:srgbClr val="1C2A33"/>
-                </a:solidFill>
-                <a:latin typeface="微软雅黑"/>
-                <a:ea typeface="微软雅黑"/>
-                <a:cs typeface="微软雅黑"/>
+              <a:rPr sz="1800" b="1">
+                <a:solidFill>
+                  <a:srgbClr val="2E7D6B"/>
+                </a:solidFill>
+                <a:latin typeface="楷体"/>
+                <a:ea typeface="楷体"/>
+                <a:cs typeface="楷体"/>
               </a:rPr>
-              <a:t>Step 4 细节</a:t>
-            </a:r>
-          </a:p>
-        </p:txBody>
-      </p:sp>
-      <p:sp>
-        <p:nvSpPr>
-          <p:cNvPr id="21" name="Rounded Rectangle 20"/>
-          <p:cNvSpPr/>
-          <p:nvPr/>
-        </p:nvSpPr>
-        <p:spPr>
-          <a:xfrm>
-            <a:off x="640080" y="4663440"/>
-            <a:ext cx="10911535" cy="685800"/>
-          </a:xfrm>
-          <a:prstGeom prst="roundRect">
-            <a:avLst/>
-          </a:prstGeom>
-          <a:solidFill>
-            <a:srgbClr val="FFFFFF"/>
-          </a:solidFill>
-          <a:ln w="22860">
-            <a:solidFill>
-              <a:srgbClr val="2E7D6B"/>
-            </a:solidFill>
-          </a:ln>
-          <a:effectLst/>
-        </p:spPr>
-        <p:style>
-          <a:lnRef idx="1">
-            <a:schemeClr val="accent1"/>
-          </a:lnRef>
-          <a:fillRef idx="3">
-            <a:schemeClr val="accent1"/>
-          </a:fillRef>
-          <a:effectRef idx="2">
-            <a:schemeClr val="accent1"/>
-          </a:effectRef>
-          <a:fontRef idx="minor">
-            <a:schemeClr val="lt1"/>
-          </a:fontRef>
-        </p:style>
-        <p:txBody>
-          <a:bodyPr rtlCol="0" anchor="ctr"/>
-          <a:lstStyle/>
-          <a:p>
-            <a:pPr algn="ctr"/>
-          </a:p>
-        </p:txBody>
-      </p:sp>
-      <p:sp>
-        <p:nvSpPr>
-          <p:cNvPr id="22" name="Oval 21"/>
-          <p:cNvSpPr/>
-          <p:nvPr/>
-        </p:nvSpPr>
-        <p:spPr>
-          <a:xfrm>
-            <a:off x="804672" y="4828032"/>
-            <a:ext cx="457200" cy="457200"/>
-          </a:xfrm>
-          <a:prstGeom prst="ellipse">
-            <a:avLst/>
-          </a:prstGeom>
-          <a:solidFill>
-            <a:srgbClr val="2E7D6B"/>
-          </a:solidFill>
-          <a:ln>
-            <a:noFill/>
-          </a:ln>
-          <a:effectLst/>
-        </p:spPr>
-        <p:style>
-          <a:lnRef idx="1">
-            <a:schemeClr val="accent1"/>
-          </a:lnRef>
-          <a:fillRef idx="3">
-            <a:schemeClr val="accent1"/>
-          </a:fillRef>
-          <a:effectRef idx="2">
-            <a:schemeClr val="accent1"/>
-          </a:effectRef>
-          <a:fontRef idx="minor">
-            <a:schemeClr val="lt1"/>
-          </a:fontRef>
-        </p:style>
-        <p:txBody>
-          <a:bodyPr rtlCol="0" anchor="ctr"/>
-          <a:lstStyle/>
-          <a:p>
-            <a:pPr algn="ctr"/>
-          </a:p>
-        </p:txBody>
-      </p:sp>
-      <p:sp>
-        <p:nvSpPr>
-          <p:cNvPr id="23" name="TextBox 22"/>
-          <p:cNvSpPr txBox="1"/>
-          <p:nvPr/>
-        </p:nvSpPr>
-        <p:spPr>
-          <a:xfrm>
-            <a:off x="804672" y="4882896"/>
-            <a:ext cx="457200" cy="384048"/>
-          </a:xfrm>
-          <a:prstGeom prst="rect">
-            <a:avLst/>
-          </a:prstGeom>
-          <a:noFill/>
-        </p:spPr>
-        <p:txBody>
-          <a:bodyPr wrap="square" anchor="t" lIns="0" rIns="0" tIns="0" bIns="0">
-            <a:spAutoFit/>
-          </a:bodyPr>
-          <a:lstStyle/>
-          <a:p>
-            <a:pPr algn="ctr"/>
-            <a:r>
-              <a:rPr sz="1600" b="1">
-                <a:solidFill>
-                  <a:srgbClr val="FFFFFF"/>
-                </a:solidFill>
-                <a:latin typeface="微软雅黑"/>
-                <a:ea typeface="微软雅黑"/>
-                <a:cs typeface="微软雅黑"/>
-              </a:rPr>
-              <a:t>5</a:t>
-            </a:r>
-          </a:p>
-        </p:txBody>
-      </p:sp>
-      <p:sp>
-        <p:nvSpPr>
-          <p:cNvPr id="24" name="TextBox 23"/>
-          <p:cNvSpPr txBox="1"/>
-          <p:nvPr/>
-        </p:nvSpPr>
-        <p:spPr>
-          <a:xfrm>
-            <a:off x="1371600" y="4773168"/>
-            <a:ext cx="9997135" cy="484632"/>
-          </a:xfrm>
-          <a:prstGeom prst="rect">
-            <a:avLst/>
-          </a:prstGeom>
-          <a:noFill/>
-        </p:spPr>
-        <p:txBody>
-          <a:bodyPr wrap="square" anchor="t" lIns="0" rIns="0" tIns="0" bIns="0">
-            <a:spAutoFit/>
-          </a:bodyPr>
-          <a:lstStyle/>
-          <a:p>
-            <a:pPr algn="l">
-              <a:lnSpc>
-                <a:spcPct val="110000"/>
-              </a:lnSpc>
-            </a:pPr>
-            <a:r>
-              <a:rPr sz="1600" b="1">
-                <a:solidFill>
-                  <a:srgbClr val="1C2A33"/>
-                </a:solidFill>
-                <a:latin typeface="微软雅黑"/>
-                <a:ea typeface="微软雅黑"/>
-                <a:cs typeface="微软雅黑"/>
-              </a:rPr>
-              <a:t>Step 5 主题</a:t>
-            </a:r>
-          </a:p>
-        </p:txBody>
-      </p:sp>
-      <p:sp>
-        <p:nvSpPr>
-          <p:cNvPr id="25" name="Rounded Rectangle 24"/>
-          <p:cNvSpPr/>
-          <p:nvPr/>
-        </p:nvSpPr>
-        <p:spPr>
-          <a:xfrm>
-            <a:off x="640080" y="5486400"/>
-            <a:ext cx="10911535" cy="685800"/>
-          </a:xfrm>
-          <a:prstGeom prst="roundRect">
-            <a:avLst/>
-          </a:prstGeom>
-          <a:solidFill>
-            <a:srgbClr val="FFFFFF"/>
-          </a:solidFill>
-          <a:ln w="22860">
-            <a:solidFill>
-              <a:srgbClr val="2E7D6B"/>
-            </a:solidFill>
-          </a:ln>
-          <a:effectLst/>
-        </p:spPr>
-        <p:style>
-          <a:lnRef idx="1">
-            <a:schemeClr val="accent1"/>
-          </a:lnRef>
-          <a:fillRef idx="3">
-            <a:schemeClr val="accent1"/>
-          </a:fillRef>
-          <a:effectRef idx="2">
-            <a:schemeClr val="accent1"/>
-          </a:effectRef>
-          <a:fontRef idx="minor">
-            <a:schemeClr val="lt1"/>
-          </a:fontRef>
-        </p:style>
-        <p:txBody>
-          <a:bodyPr rtlCol="0" anchor="ctr"/>
-          <a:lstStyle/>
-          <a:p>
-            <a:pPr algn="ctr"/>
-          </a:p>
-        </p:txBody>
-      </p:sp>
-      <p:sp>
-        <p:nvSpPr>
-          <p:cNvPr id="26" name="Oval 25"/>
-          <p:cNvSpPr/>
-          <p:nvPr/>
-        </p:nvSpPr>
-        <p:spPr>
-          <a:xfrm>
-            <a:off x="804672" y="5650992"/>
-            <a:ext cx="457200" cy="457200"/>
-          </a:xfrm>
-          <a:prstGeom prst="ellipse">
-            <a:avLst/>
-          </a:prstGeom>
-          <a:solidFill>
-            <a:srgbClr val="2E7D6B"/>
-          </a:solidFill>
-          <a:ln>
-            <a:noFill/>
-          </a:ln>
-          <a:effectLst/>
-        </p:spPr>
-        <p:style>
-          <a:lnRef idx="1">
-            <a:schemeClr val="accent1"/>
-          </a:lnRef>
-          <a:fillRef idx="3">
-            <a:schemeClr val="accent1"/>
-          </a:fillRef>
-          <a:effectRef idx="2">
-            <a:schemeClr val="accent1"/>
-          </a:effectRef>
-          <a:fontRef idx="minor">
-            <a:schemeClr val="lt1"/>
-          </a:fontRef>
-        </p:style>
-        <p:txBody>
-          <a:bodyPr rtlCol="0" anchor="ctr"/>
-          <a:lstStyle/>
-          <a:p>
-            <a:pPr algn="ctr"/>
-          </a:p>
-        </p:txBody>
-      </p:sp>
-      <p:sp>
-        <p:nvSpPr>
-          <p:cNvPr id="27" name="TextBox 26"/>
-          <p:cNvSpPr txBox="1"/>
-          <p:nvPr/>
-        </p:nvSpPr>
-        <p:spPr>
-          <a:xfrm>
-            <a:off x="804672" y="5705856"/>
-            <a:ext cx="457200" cy="384048"/>
-          </a:xfrm>
-          <a:prstGeom prst="rect">
-            <a:avLst/>
-          </a:prstGeom>
-          <a:noFill/>
-        </p:spPr>
-        <p:txBody>
-          <a:bodyPr wrap="square" anchor="t" lIns="0" rIns="0" tIns="0" bIns="0">
-            <a:spAutoFit/>
-          </a:bodyPr>
-          <a:lstStyle/>
-          <a:p>
-            <a:pPr algn="ctr"/>
-            <a:r>
-              <a:rPr sz="1600" b="1">
-                <a:solidFill>
-                  <a:srgbClr val="FFFFFF"/>
-                </a:solidFill>
-                <a:latin typeface="微软雅黑"/>
-                <a:ea typeface="微软雅黑"/>
-                <a:cs typeface="微软雅黑"/>
-              </a:rPr>
-              <a:t>6</a:t>
-            </a:r>
-          </a:p>
-        </p:txBody>
-      </p:sp>
-      <p:sp>
-        <p:nvSpPr>
-          <p:cNvPr id="28" name="TextBox 27"/>
-          <p:cNvSpPr txBox="1"/>
-          <p:nvPr/>
-        </p:nvSpPr>
-        <p:spPr>
-          <a:xfrm>
-            <a:off x="1371600" y="5596128"/>
-            <a:ext cx="9997135" cy="484632"/>
-          </a:xfrm>
-          <a:prstGeom prst="rect">
-            <a:avLst/>
-          </a:prstGeom>
-          <a:noFill/>
-        </p:spPr>
-        <p:txBody>
-          <a:bodyPr wrap="square" anchor="t" lIns="0" rIns="0" tIns="0" bIns="0">
-            <a:spAutoFit/>
-          </a:bodyPr>
-          <a:lstStyle/>
-          <a:p>
-            <a:pPr algn="l">
-              <a:lnSpc>
-                <a:spcPct val="110000"/>
-              </a:lnSpc>
-            </a:pPr>
-            <a:r>
-              <a:rPr sz="1600" b="1">
-                <a:solidFill>
-                  <a:srgbClr val="1C2A33"/>
-                </a:solidFill>
-                <a:latin typeface="微软雅黑"/>
-                <a:ea typeface="微软雅黑"/>
-                <a:cs typeface="微软雅黑"/>
-              </a:rPr>
-              <a:t>Step 6 小结+作业</a:t>
-            </a:r>
-          </a:p>
-        </p:txBody>
-      </p:sp>
-      <p:sp>
-        <p:nvSpPr>
-          <p:cNvPr id="29" name="TextBox 28"/>
+              <a:t>④ 对比法（与祥林嫂）。</a:t>
+            </a:r>
+          </a:p>
+        </p:txBody>
+      </p:sp>
+      <p:sp>
+        <p:nvSpPr>
+          <p:cNvPr id="22" name="TextBox 21"/>
           <p:cNvSpPr txBox="1"/>
           <p:nvPr/>
         </p:nvSpPr>
@@ -6589,7 +6798,7 @@
                 <a:ea typeface="微软雅黑"/>
                 <a:cs typeface="微软雅黑"/>
               </a:rPr>
-              <a:t>易混易错</a:t>
+              <a:t>难点</a:t>
             </a:r>
           </a:p>
         </p:txBody>
@@ -6640,14 +6849,51 @@
       </p:sp>
       <p:sp>
         <p:nvSpPr>
-          <p:cNvPr id="5" name="Rounded Rectangle 4"/>
+          <p:cNvPr id="5" name="TextBox 4"/>
+          <p:cNvSpPr txBox="1"/>
+          <p:nvPr/>
+        </p:nvSpPr>
+        <p:spPr>
+          <a:xfrm>
+            <a:off x="640080" y="1325880"/>
+            <a:ext cx="10058400" cy="548640"/>
+          </a:xfrm>
+          <a:prstGeom prst="rect">
+            <a:avLst/>
+          </a:prstGeom>
+          <a:noFill/>
+        </p:spPr>
+        <p:txBody>
+          <a:bodyPr wrap="square" anchor="t" lIns="0" rIns="0" tIns="0" bIns="0">
+            <a:spAutoFit/>
+          </a:bodyPr>
+          <a:lstStyle/>
+          <a:p>
+            <a:pPr algn="l"/>
+            <a:r>
+              <a:rPr sz="2800" b="1">
+                <a:solidFill>
+                  <a:srgbClr val="1C2A33"/>
+                </a:solidFill>
+                <a:latin typeface="楷体"/>
+                <a:ea typeface="楷体"/>
+                <a:cs typeface="楷体"/>
+              </a:rPr>
+              <a:t>本课难点</a:t>
+            </a:r>
+          </a:p>
+        </p:txBody>
+      </p:sp>
+      <p:sp>
+        <p:nvSpPr>
+          <p:cNvPr id="6" name="Rounded Rectangle 5"/>
           <p:cNvSpPr/>
           <p:nvPr/>
         </p:nvSpPr>
         <p:spPr>
           <a:xfrm>
-            <a:off x="640080" y="1417320"/>
-            <a:ext cx="5349240" cy="2057400"/>
+            <a:off x="640080" y="2194560"/>
+            <a:ext cx="3393338" cy="3931920"/>
           </a:xfrm>
           <a:prstGeom prst="roundRect">
             <a:avLst/>
@@ -6655,7 +6901,7 @@
           <a:solidFill>
             <a:srgbClr val="FFFFFF"/>
           </a:solidFill>
-          <a:ln w="22860">
+          <a:ln w="20320">
             <a:solidFill>
               <a:srgbClr val="B23A2A"/>
             </a:solidFill>
@@ -6686,14 +6932,14 @@
       </p:sp>
       <p:sp>
         <p:nvSpPr>
-          <p:cNvPr id="6" name="Oval 5"/>
+          <p:cNvPr id="7" name="Oval 6"/>
           <p:cNvSpPr/>
           <p:nvPr/>
         </p:nvSpPr>
         <p:spPr>
           <a:xfrm>
-            <a:off x="804672" y="1581912"/>
-            <a:ext cx="457200" cy="457200"/>
+            <a:off x="868680" y="2423160"/>
+            <a:ext cx="548640" cy="548640"/>
           </a:xfrm>
           <a:prstGeom prst="ellipse">
             <a:avLst/>
@@ -6730,14 +6976,14 @@
       </p:sp>
       <p:sp>
         <p:nvSpPr>
-          <p:cNvPr id="7" name="TextBox 6"/>
+          <p:cNvPr id="8" name="TextBox 7"/>
           <p:cNvSpPr txBox="1"/>
           <p:nvPr/>
         </p:nvSpPr>
         <p:spPr>
           <a:xfrm>
-            <a:off x="804672" y="1636776"/>
-            <a:ext cx="457200" cy="384048"/>
+            <a:off x="868680" y="2487168"/>
+            <a:ext cx="548640" cy="411480"/>
           </a:xfrm>
           <a:prstGeom prst="rect">
             <a:avLst/>
@@ -6752,7 +6998,7 @@
           <a:p>
             <a:pPr algn="ctr"/>
             <a:r>
-              <a:rPr sz="1600" b="1">
+              <a:rPr sz="2000" b="1">
                 <a:solidFill>
                   <a:srgbClr val="FFFFFF"/>
                 </a:solidFill>
@@ -6760,21 +7006,21 @@
                 <a:ea typeface="微软雅黑"/>
                 <a:cs typeface="微软雅黑"/>
               </a:rPr>
-              <a:t>!</a:t>
-            </a:r>
-          </a:p>
-        </p:txBody>
-      </p:sp>
-      <p:sp>
-        <p:nvSpPr>
-          <p:cNvPr id="8" name="TextBox 7"/>
+              <a:t>1</a:t>
+            </a:r>
+          </a:p>
+        </p:txBody>
+      </p:sp>
+      <p:sp>
+        <p:nvSpPr>
+          <p:cNvPr id="9" name="TextBox 8"/>
           <p:cNvSpPr txBox="1"/>
           <p:nvPr/>
         </p:nvSpPr>
         <p:spPr>
           <a:xfrm>
-            <a:off x="1371600" y="1527048"/>
-            <a:ext cx="4434840" cy="457200"/>
+            <a:off x="1554480" y="2441448"/>
+            <a:ext cx="2296058" cy="640080"/>
           </a:xfrm>
           <a:prstGeom prst="rect">
             <a:avLst/>
@@ -6787,76 +7033,93 @@
           </a:bodyPr>
           <a:lstStyle/>
           <a:p>
-            <a:pPr algn="l">
-              <a:lnSpc>
-                <a:spcPct val="110000"/>
-              </a:lnSpc>
-            </a:pPr>
-            <a:r>
-              <a:rPr sz="1600" b="1">
-                <a:solidFill>
-                  <a:srgbClr val="1C2A33"/>
-                </a:solidFill>
-                <a:latin typeface="微软雅黑"/>
-                <a:ea typeface="微软雅黑"/>
-                <a:cs typeface="微软雅黑"/>
-              </a:rPr>
-              <a:t/>
-            </a:r>
-          </a:p>
-        </p:txBody>
-      </p:sp>
-      <p:sp>
-        <p:nvSpPr>
-          <p:cNvPr id="9" name="TextBox 8"/>
-          <p:cNvSpPr txBox="1"/>
-          <p:nvPr/>
-        </p:nvSpPr>
-        <p:spPr>
-          <a:xfrm>
-            <a:off x="1371600" y="1965960"/>
-            <a:ext cx="4434840" cy="1417320"/>
-          </a:xfrm>
-          <a:prstGeom prst="rect">
-            <a:avLst/>
-          </a:prstGeom>
-          <a:noFill/>
-        </p:spPr>
-        <p:txBody>
-          <a:bodyPr wrap="square" anchor="t" lIns="0" rIns="0" tIns="0" bIns="0">
-            <a:spAutoFit/>
-          </a:bodyPr>
-          <a:lstStyle/>
-          <a:p>
-            <a:pPr algn="l">
-              <a:lnSpc>
-                <a:spcPct val="128000"/>
-              </a:lnSpc>
-            </a:pPr>
-            <a:r>
-              <a:rPr sz="1400" b="0">
-                <a:solidFill>
-                  <a:srgbClr val="1C2A33"/>
+            <a:pPr algn="l"/>
+            <a:r>
+              <a:rPr sz="1400" b="1">
+                <a:solidFill>
+                  <a:srgbClr val="6B6258"/>
                 </a:solidFill>
                 <a:latin typeface="楷体"/>
                 <a:ea typeface="楷体"/>
                 <a:cs typeface="楷体"/>
               </a:rPr>
-              <a:t>① 转变层次。原因：易当突然，需节点。</a:t>
-            </a:r>
-          </a:p>
-        </p:txBody>
-      </p:sp>
-      <p:sp>
-        <p:nvSpPr>
-          <p:cNvPr id="10" name="Rounded Rectangle 9"/>
+              <a:t>易卡处</a:t>
+            </a:r>
+          </a:p>
+        </p:txBody>
+      </p:sp>
+      <p:sp>
+        <p:nvSpPr>
+          <p:cNvPr id="10" name="TextBox 9"/>
+          <p:cNvSpPr txBox="1"/>
+          <p:nvPr/>
+        </p:nvSpPr>
+        <p:spPr>
+          <a:xfrm>
+            <a:off x="914400" y="3200400"/>
+            <a:ext cx="2844698" cy="2743200"/>
+          </a:xfrm>
+          <a:prstGeom prst="rect">
+            <a:avLst/>
+          </a:prstGeom>
+          <a:noFill/>
+        </p:spPr>
+        <p:txBody>
+          <a:bodyPr wrap="square" anchor="t" lIns="0" rIns="0" tIns="0" bIns="0">
+            <a:spAutoFit/>
+          </a:bodyPr>
+          <a:lstStyle/>
+          <a:p>
+            <a:pPr algn="l">
+              <a:lnSpc>
+                <a:spcPct val="145000"/>
+              </a:lnSpc>
+              <a:spcAft>
+                <a:spcPts val="600"/>
+              </a:spcAft>
+            </a:pPr>
+            <a:r>
+              <a:rPr sz="1500" b="1">
+                <a:solidFill>
+                  <a:srgbClr val="1C2A33"/>
+                </a:solidFill>
+                <a:latin typeface="楷体"/>
+                <a:ea typeface="楷体"/>
+                <a:cs typeface="楷体"/>
+              </a:rPr>
+              <a:t>转变层次</a:t>
+            </a:r>
+          </a:p>
+          <a:p>
+            <a:pPr algn="l">
+              <a:lnSpc>
+                <a:spcPct val="150000"/>
+              </a:lnSpc>
+            </a:pPr>
+            <a:r>
+              <a:rPr sz="1300" b="0">
+                <a:solidFill>
+                  <a:srgbClr val="B23A2A"/>
+                </a:solidFill>
+                <a:latin typeface="楷体"/>
+                <a:ea typeface="楷体"/>
+                <a:cs typeface="楷体"/>
+              </a:rPr>
+              <a:t>破解：易当突然，需节点。</a:t>
+            </a:r>
+          </a:p>
+        </p:txBody>
+      </p:sp>
+      <p:sp>
+        <p:nvSpPr>
+          <p:cNvPr id="11" name="Rounded Rectangle 10"/>
           <p:cNvSpPr/>
           <p:nvPr/>
         </p:nvSpPr>
         <p:spPr>
           <a:xfrm>
-            <a:off x="6263640" y="1417320"/>
-            <a:ext cx="5349240" cy="2057400"/>
+            <a:off x="4399178" y="2194560"/>
+            <a:ext cx="3393338" cy="3931920"/>
           </a:xfrm>
           <a:prstGeom prst="roundRect">
             <a:avLst/>
@@ -6864,9 +7127,9 @@
           <a:solidFill>
             <a:srgbClr val="FFFFFF"/>
           </a:solidFill>
-          <a:ln w="22860">
+          <a:ln w="20320">
             <a:solidFill>
-              <a:srgbClr val="B23A2A"/>
+              <a:srgbClr val="2E7D6B"/>
             </a:solidFill>
           </a:ln>
           <a:effectLst/>
@@ -6895,20 +7158,20 @@
       </p:sp>
       <p:sp>
         <p:nvSpPr>
-          <p:cNvPr id="11" name="Oval 10"/>
+          <p:cNvPr id="12" name="Oval 11"/>
           <p:cNvSpPr/>
           <p:nvPr/>
         </p:nvSpPr>
         <p:spPr>
           <a:xfrm>
-            <a:off x="6428232" y="1581912"/>
-            <a:ext cx="457200" cy="457200"/>
+            <a:off x="4627778" y="2423160"/>
+            <a:ext cx="548640" cy="548640"/>
           </a:xfrm>
           <a:prstGeom prst="ellipse">
             <a:avLst/>
           </a:prstGeom>
           <a:solidFill>
-            <a:srgbClr val="B23A2A"/>
+            <a:srgbClr val="2E7D6B"/>
           </a:solidFill>
           <a:ln>
             <a:noFill/>
@@ -6939,14 +7202,14 @@
       </p:sp>
       <p:sp>
         <p:nvSpPr>
-          <p:cNvPr id="12" name="TextBox 11"/>
+          <p:cNvPr id="13" name="TextBox 12"/>
           <p:cNvSpPr txBox="1"/>
           <p:nvPr/>
         </p:nvSpPr>
         <p:spPr>
           <a:xfrm>
-            <a:off x="6428232" y="1636776"/>
-            <a:ext cx="457200" cy="384048"/>
+            <a:off x="4627778" y="2487168"/>
+            <a:ext cx="548640" cy="411480"/>
           </a:xfrm>
           <a:prstGeom prst="rect">
             <a:avLst/>
@@ -6961,7 +7224,7 @@
           <a:p>
             <a:pPr algn="ctr"/>
             <a:r>
-              <a:rPr sz="1600" b="1">
+              <a:rPr sz="2000" b="1">
                 <a:solidFill>
                   <a:srgbClr val="FFFFFF"/>
                 </a:solidFill>
@@ -6969,21 +7232,21 @@
                 <a:ea typeface="微软雅黑"/>
                 <a:cs typeface="微软雅黑"/>
               </a:rPr>
-              <a:t>!</a:t>
-            </a:r>
-          </a:p>
-        </p:txBody>
-      </p:sp>
-      <p:sp>
-        <p:nvSpPr>
-          <p:cNvPr id="13" name="TextBox 12"/>
+              <a:t>2</a:t>
+            </a:r>
+          </a:p>
+        </p:txBody>
+      </p:sp>
+      <p:sp>
+        <p:nvSpPr>
+          <p:cNvPr id="14" name="TextBox 13"/>
           <p:cNvSpPr txBox="1"/>
           <p:nvPr/>
         </p:nvSpPr>
         <p:spPr>
           <a:xfrm>
-            <a:off x="6995160" y="1527048"/>
-            <a:ext cx="4434840" cy="457200"/>
+            <a:off x="5313578" y="2441448"/>
+            <a:ext cx="2296058" cy="640080"/>
           </a:xfrm>
           <a:prstGeom prst="rect">
             <a:avLst/>
@@ -6996,76 +7259,93 @@
           </a:bodyPr>
           <a:lstStyle/>
           <a:p>
-            <a:pPr algn="l">
-              <a:lnSpc>
-                <a:spcPct val="110000"/>
-              </a:lnSpc>
-            </a:pPr>
-            <a:r>
-              <a:rPr sz="1600" b="1">
-                <a:solidFill>
-                  <a:srgbClr val="1C2A33"/>
-                </a:solidFill>
-                <a:latin typeface="微软雅黑"/>
-                <a:ea typeface="微软雅黑"/>
-                <a:cs typeface="微软雅黑"/>
-              </a:rPr>
-              <a:t/>
-            </a:r>
-          </a:p>
-        </p:txBody>
-      </p:sp>
-      <p:sp>
-        <p:nvSpPr>
-          <p:cNvPr id="14" name="TextBox 13"/>
-          <p:cNvSpPr txBox="1"/>
-          <p:nvPr/>
-        </p:nvSpPr>
-        <p:spPr>
-          <a:xfrm>
-            <a:off x="6995160" y="1965960"/>
-            <a:ext cx="4434840" cy="1417320"/>
-          </a:xfrm>
-          <a:prstGeom prst="rect">
-            <a:avLst/>
-          </a:prstGeom>
-          <a:noFill/>
-        </p:spPr>
-        <p:txBody>
-          <a:bodyPr wrap="square" anchor="t" lIns="0" rIns="0" tIns="0" bIns="0">
-            <a:spAutoFit/>
-          </a:bodyPr>
-          <a:lstStyle/>
-          <a:p>
-            <a:pPr algn="l">
-              <a:lnSpc>
-                <a:spcPct val="128000"/>
-              </a:lnSpc>
-            </a:pPr>
-            <a:r>
-              <a:rPr sz="1400" b="0">
-                <a:solidFill>
-                  <a:srgbClr val="1C2A33"/>
+            <a:pPr algn="l"/>
+            <a:r>
+              <a:rPr sz="1400" b="1">
+                <a:solidFill>
+                  <a:srgbClr val="6B6258"/>
                 </a:solidFill>
                 <a:latin typeface="楷体"/>
                 <a:ea typeface="楷体"/>
                 <a:cs typeface="楷体"/>
               </a:rPr>
-              <a:t>② 风雪作用。原因：易当天气，需点推动/象征。</a:t>
-            </a:r>
-          </a:p>
-        </p:txBody>
-      </p:sp>
-      <p:sp>
-        <p:nvSpPr>
-          <p:cNvPr id="15" name="Rounded Rectangle 14"/>
+              <a:t>易卡处</a:t>
+            </a:r>
+          </a:p>
+        </p:txBody>
+      </p:sp>
+      <p:sp>
+        <p:nvSpPr>
+          <p:cNvPr id="15" name="TextBox 14"/>
+          <p:cNvSpPr txBox="1"/>
+          <p:nvPr/>
+        </p:nvSpPr>
+        <p:spPr>
+          <a:xfrm>
+            <a:off x="4673498" y="3200400"/>
+            <a:ext cx="2844698" cy="2743200"/>
+          </a:xfrm>
+          <a:prstGeom prst="rect">
+            <a:avLst/>
+          </a:prstGeom>
+          <a:noFill/>
+        </p:spPr>
+        <p:txBody>
+          <a:bodyPr wrap="square" anchor="t" lIns="0" rIns="0" tIns="0" bIns="0">
+            <a:spAutoFit/>
+          </a:bodyPr>
+          <a:lstStyle/>
+          <a:p>
+            <a:pPr algn="l">
+              <a:lnSpc>
+                <a:spcPct val="145000"/>
+              </a:lnSpc>
+              <a:spcAft>
+                <a:spcPts val="600"/>
+              </a:spcAft>
+            </a:pPr>
+            <a:r>
+              <a:rPr sz="1500" b="1">
+                <a:solidFill>
+                  <a:srgbClr val="1C2A33"/>
+                </a:solidFill>
+                <a:latin typeface="楷体"/>
+                <a:ea typeface="楷体"/>
+                <a:cs typeface="楷体"/>
+              </a:rPr>
+              <a:t>风雪作用</a:t>
+            </a:r>
+          </a:p>
+          <a:p>
+            <a:pPr algn="l">
+              <a:lnSpc>
+                <a:spcPct val="150000"/>
+              </a:lnSpc>
+            </a:pPr>
+            <a:r>
+              <a:rPr sz="1300" b="0">
+                <a:solidFill>
+                  <a:srgbClr val="2E7D6B"/>
+                </a:solidFill>
+                <a:latin typeface="楷体"/>
+                <a:ea typeface="楷体"/>
+                <a:cs typeface="楷体"/>
+              </a:rPr>
+              <a:t>破解：易当天气，需点推动/象征。</a:t>
+            </a:r>
+          </a:p>
+        </p:txBody>
+      </p:sp>
+      <p:sp>
+        <p:nvSpPr>
+          <p:cNvPr id="16" name="Rounded Rectangle 15"/>
           <p:cNvSpPr/>
           <p:nvPr/>
         </p:nvSpPr>
         <p:spPr>
           <a:xfrm>
-            <a:off x="640080" y="3703320"/>
-            <a:ext cx="5349240" cy="2057400"/>
+            <a:off x="8158276" y="2194560"/>
+            <a:ext cx="3393338" cy="3931920"/>
           </a:xfrm>
           <a:prstGeom prst="roundRect">
             <a:avLst/>
@@ -7073,9 +7353,9 @@
           <a:solidFill>
             <a:srgbClr val="FFFFFF"/>
           </a:solidFill>
-          <a:ln w="22860">
+          <a:ln w="20320">
             <a:solidFill>
-              <a:srgbClr val="B23A2A"/>
+              <a:srgbClr val="C8A86B"/>
             </a:solidFill>
           </a:ln>
           <a:effectLst/>
@@ -7104,20 +7384,20 @@
       </p:sp>
       <p:sp>
         <p:nvSpPr>
-          <p:cNvPr id="16" name="Oval 15"/>
+          <p:cNvPr id="17" name="Oval 16"/>
           <p:cNvSpPr/>
           <p:nvPr/>
         </p:nvSpPr>
         <p:spPr>
           <a:xfrm>
-            <a:off x="804672" y="3867912"/>
-            <a:ext cx="457200" cy="457200"/>
+            <a:off x="8386876" y="2423160"/>
+            <a:ext cx="548640" cy="548640"/>
           </a:xfrm>
           <a:prstGeom prst="ellipse">
             <a:avLst/>
           </a:prstGeom>
           <a:solidFill>
-            <a:srgbClr val="B23A2A"/>
+            <a:srgbClr val="C8A86B"/>
           </a:solidFill>
           <a:ln>
             <a:noFill/>
@@ -7148,14 +7428,14 @@
       </p:sp>
       <p:sp>
         <p:nvSpPr>
-          <p:cNvPr id="17" name="TextBox 16"/>
+          <p:cNvPr id="18" name="TextBox 17"/>
           <p:cNvSpPr txBox="1"/>
           <p:nvPr/>
         </p:nvSpPr>
         <p:spPr>
           <a:xfrm>
-            <a:off x="804672" y="3922776"/>
-            <a:ext cx="457200" cy="384048"/>
+            <a:off x="8386876" y="2487168"/>
+            <a:ext cx="548640" cy="411480"/>
           </a:xfrm>
           <a:prstGeom prst="rect">
             <a:avLst/>
@@ -7170,7 +7450,7 @@
           <a:p>
             <a:pPr algn="ctr"/>
             <a:r>
-              <a:rPr sz="1600" b="1">
+              <a:rPr sz="2000" b="1">
                 <a:solidFill>
                   <a:srgbClr val="FFFFFF"/>
                 </a:solidFill>
@@ -7178,21 +7458,21 @@
                 <a:ea typeface="微软雅黑"/>
                 <a:cs typeface="微软雅黑"/>
               </a:rPr>
-              <a:t>!</a:t>
-            </a:r>
-          </a:p>
-        </p:txBody>
-      </p:sp>
-      <p:sp>
-        <p:nvSpPr>
-          <p:cNvPr id="18" name="TextBox 17"/>
+              <a:t>3</a:t>
+            </a:r>
+          </a:p>
+        </p:txBody>
+      </p:sp>
+      <p:sp>
+        <p:nvSpPr>
+          <p:cNvPr id="19" name="TextBox 18"/>
           <p:cNvSpPr txBox="1"/>
           <p:nvPr/>
         </p:nvSpPr>
         <p:spPr>
           <a:xfrm>
-            <a:off x="1371600" y="3813048"/>
-            <a:ext cx="4434840" cy="457200"/>
+            <a:off x="9072676" y="2441448"/>
+            <a:ext cx="2296058" cy="640080"/>
           </a:xfrm>
           <a:prstGeom prst="rect">
             <a:avLst/>
@@ -7205,62 +7485,17 @@
           </a:bodyPr>
           <a:lstStyle/>
           <a:p>
-            <a:pPr algn="l">
-              <a:lnSpc>
-                <a:spcPct val="110000"/>
-              </a:lnSpc>
-            </a:pPr>
-            <a:r>
-              <a:rPr sz="1600" b="1">
-                <a:solidFill>
-                  <a:srgbClr val="1C2A33"/>
-                </a:solidFill>
-                <a:latin typeface="微软雅黑"/>
-                <a:ea typeface="微软雅黑"/>
-                <a:cs typeface="微软雅黑"/>
-              </a:rPr>
-              <a:t/>
-            </a:r>
-          </a:p>
-        </p:txBody>
-      </p:sp>
-      <p:sp>
-        <p:nvSpPr>
-          <p:cNvPr id="19" name="TextBox 18"/>
-          <p:cNvSpPr txBox="1"/>
-          <p:nvPr/>
-        </p:nvSpPr>
-        <p:spPr>
-          <a:xfrm>
-            <a:off x="1371600" y="4251960"/>
-            <a:ext cx="4434840" cy="1417320"/>
-          </a:xfrm>
-          <a:prstGeom prst="rect">
-            <a:avLst/>
-          </a:prstGeom>
-          <a:noFill/>
-        </p:spPr>
-        <p:txBody>
-          <a:bodyPr wrap="square" anchor="t" lIns="0" rIns="0" tIns="0" bIns="0">
-            <a:spAutoFit/>
-          </a:bodyPr>
-          <a:lstStyle/>
-          <a:p>
-            <a:pPr algn="l">
-              <a:lnSpc>
-                <a:spcPct val="128000"/>
-              </a:lnSpc>
-            </a:pPr>
-            <a:r>
-              <a:rPr sz="1400" b="0">
-                <a:solidFill>
-                  <a:srgbClr val="1C2A33"/>
+            <a:pPr algn="l"/>
+            <a:r>
+              <a:rPr sz="1400" b="1">
+                <a:solidFill>
+                  <a:srgbClr val="6B6258"/>
                 </a:solidFill>
                 <a:latin typeface="楷体"/>
                 <a:ea typeface="楷体"/>
                 <a:cs typeface="楷体"/>
               </a:rPr>
-              <a:t>③ 主题。原因：易归报仇，需指时代。</a:t>
+              <a:t>易卡处</a:t>
             </a:r>
           </a:p>
         </p:txBody>
@@ -7268,6 +7503,68 @@
       <p:sp>
         <p:nvSpPr>
           <p:cNvPr id="20" name="TextBox 19"/>
+          <p:cNvSpPr txBox="1"/>
+          <p:nvPr/>
+        </p:nvSpPr>
+        <p:spPr>
+          <a:xfrm>
+            <a:off x="8432596" y="3200400"/>
+            <a:ext cx="2844698" cy="2743200"/>
+          </a:xfrm>
+          <a:prstGeom prst="rect">
+            <a:avLst/>
+          </a:prstGeom>
+          <a:noFill/>
+        </p:spPr>
+        <p:txBody>
+          <a:bodyPr wrap="square" anchor="t" lIns="0" rIns="0" tIns="0" bIns="0">
+            <a:spAutoFit/>
+          </a:bodyPr>
+          <a:lstStyle/>
+          <a:p>
+            <a:pPr algn="l">
+              <a:lnSpc>
+                <a:spcPct val="145000"/>
+              </a:lnSpc>
+              <a:spcAft>
+                <a:spcPts val="600"/>
+              </a:spcAft>
+            </a:pPr>
+            <a:r>
+              <a:rPr sz="1500" b="1">
+                <a:solidFill>
+                  <a:srgbClr val="1C2A33"/>
+                </a:solidFill>
+                <a:latin typeface="楷体"/>
+                <a:ea typeface="楷体"/>
+                <a:cs typeface="楷体"/>
+              </a:rPr>
+              <a:t>主题</a:t>
+            </a:r>
+          </a:p>
+          <a:p>
+            <a:pPr algn="l">
+              <a:lnSpc>
+                <a:spcPct val="150000"/>
+              </a:lnSpc>
+            </a:pPr>
+            <a:r>
+              <a:rPr sz="1300" b="0">
+                <a:solidFill>
+                  <a:srgbClr val="C8A86B"/>
+                </a:solidFill>
+                <a:latin typeface="楷体"/>
+                <a:ea typeface="楷体"/>
+                <a:cs typeface="楷体"/>
+              </a:rPr>
+              <a:t>破解：易归报仇，需指时代。</a:t>
+            </a:r>
+          </a:p>
+        </p:txBody>
+      </p:sp>
+      <p:sp>
+        <p:nvSpPr>
+          <p:cNvPr id="21" name="TextBox 20"/>
           <p:cNvSpPr txBox="1"/>
           <p:nvPr/>
         </p:nvSpPr>
@@ -7394,13 +7691,13 @@
             <a:r>
               <a:rPr sz="1300" b="1">
                 <a:solidFill>
-                  <a:srgbClr val="C8A86B"/>
+                  <a:srgbClr val="B23A2A"/>
                 </a:solidFill>
                 <a:latin typeface="微软雅黑"/>
                 <a:ea typeface="微软雅黑"/>
                 <a:cs typeface="微软雅黑"/>
               </a:rPr>
-              <a:t>要点板书</a:t>
+              <a:t>板书精华</a:t>
             </a:r>
           </a:p>
         </p:txBody>
@@ -7415,6 +7712,133 @@
           <a:xfrm>
             <a:off x="640080" y="1097280"/>
             <a:ext cx="822960" cy="30480"/>
+          </a:xfrm>
+          <a:prstGeom prst="rect">
+            <a:avLst/>
+          </a:prstGeom>
+          <a:solidFill>
+            <a:srgbClr val="B23A2A"/>
+          </a:solidFill>
+          <a:ln>
+            <a:noFill/>
+          </a:ln>
+          <a:effectLst/>
+        </p:spPr>
+        <p:style>
+          <a:lnRef idx="1">
+            <a:schemeClr val="accent1"/>
+          </a:lnRef>
+          <a:fillRef idx="3">
+            <a:schemeClr val="accent1"/>
+          </a:fillRef>
+          <a:effectRef idx="2">
+            <a:schemeClr val="accent1"/>
+          </a:effectRef>
+          <a:fontRef idx="minor">
+            <a:schemeClr val="lt1"/>
+          </a:fontRef>
+        </p:style>
+        <p:txBody>
+          <a:bodyPr rtlCol="0" anchor="ctr"/>
+          <a:lstStyle/>
+          <a:p>
+            <a:pPr algn="ctr"/>
+          </a:p>
+        </p:txBody>
+      </p:sp>
+      <p:sp>
+        <p:nvSpPr>
+          <p:cNvPr id="5" name="TextBox 4"/>
+          <p:cNvSpPr txBox="1"/>
+          <p:nvPr/>
+        </p:nvSpPr>
+        <p:spPr>
+          <a:xfrm>
+            <a:off x="640080" y="1325880"/>
+            <a:ext cx="10058400" cy="548640"/>
+          </a:xfrm>
+          <a:prstGeom prst="rect">
+            <a:avLst/>
+          </a:prstGeom>
+          <a:noFill/>
+        </p:spPr>
+        <p:txBody>
+          <a:bodyPr wrap="square" anchor="t" lIns="0" rIns="0" tIns="0" bIns="0">
+            <a:spAutoFit/>
+          </a:bodyPr>
+          <a:lstStyle/>
+          <a:p>
+            <a:pPr algn="l"/>
+            <a:r>
+              <a:rPr sz="2800" b="1">
+                <a:solidFill>
+                  <a:srgbClr val="1C2A33"/>
+                </a:solidFill>
+                <a:latin typeface="楷体"/>
+                <a:ea typeface="楷体"/>
+                <a:cs typeface="楷体"/>
+              </a:rPr>
+              <a:t>板书精华</a:t>
+            </a:r>
+          </a:p>
+        </p:txBody>
+      </p:sp>
+      <p:sp>
+        <p:nvSpPr>
+          <p:cNvPr id="6" name="Rounded Rectangle 5"/>
+          <p:cNvSpPr/>
+          <p:nvPr/>
+        </p:nvSpPr>
+        <p:spPr>
+          <a:xfrm>
+            <a:off x="640080" y="2057400"/>
+            <a:ext cx="10911535" cy="4297680"/>
+          </a:xfrm>
+          <a:prstGeom prst="roundRect">
+            <a:avLst/>
+          </a:prstGeom>
+          <a:solidFill>
+            <a:srgbClr val="FFFFFF"/>
+          </a:solidFill>
+          <a:ln w="20320">
+            <a:solidFill>
+              <a:srgbClr val="C8A86B"/>
+            </a:solidFill>
+          </a:ln>
+          <a:effectLst/>
+        </p:spPr>
+        <p:style>
+          <a:lnRef idx="1">
+            <a:schemeClr val="accent1"/>
+          </a:lnRef>
+          <a:fillRef idx="3">
+            <a:schemeClr val="accent1"/>
+          </a:fillRef>
+          <a:effectRef idx="2">
+            <a:schemeClr val="accent1"/>
+          </a:effectRef>
+          <a:fontRef idx="minor">
+            <a:schemeClr val="lt1"/>
+          </a:fontRef>
+        </p:style>
+        <p:txBody>
+          <a:bodyPr rtlCol="0" anchor="ctr"/>
+          <a:lstStyle/>
+          <a:p>
+            <a:pPr algn="ctr"/>
+          </a:p>
+        </p:txBody>
+      </p:sp>
+      <p:sp>
+        <p:nvSpPr>
+          <p:cNvPr id="7" name="Rectangle 6"/>
+          <p:cNvSpPr/>
+          <p:nvPr/>
+        </p:nvSpPr>
+        <p:spPr>
+          <a:xfrm>
+            <a:off x="640080" y="2057400"/>
+            <a:ext cx="128016" cy="4297680"/>
           </a:xfrm>
           <a:prstGeom prst="rect">
             <a:avLst/>
@@ -7451,60 +7875,14 @@
       </p:sp>
       <p:sp>
         <p:nvSpPr>
-          <p:cNvPr id="5" name="Rounded Rectangle 4"/>
-          <p:cNvSpPr/>
-          <p:nvPr/>
-        </p:nvSpPr>
-        <p:spPr>
-          <a:xfrm>
-            <a:off x="640080" y="1417320"/>
-            <a:ext cx="10911535" cy="5394960"/>
-          </a:xfrm>
-          <a:prstGeom prst="roundRect">
-            <a:avLst/>
-          </a:prstGeom>
-          <a:solidFill>
-            <a:srgbClr val="FFFFFF"/>
-          </a:solidFill>
-          <a:ln w="25400">
-            <a:solidFill>
-              <a:srgbClr val="C8A86B"/>
-            </a:solidFill>
-          </a:ln>
-          <a:effectLst/>
-        </p:spPr>
-        <p:style>
-          <a:lnRef idx="1">
-            <a:schemeClr val="accent1"/>
-          </a:lnRef>
-          <a:fillRef idx="3">
-            <a:schemeClr val="accent1"/>
-          </a:fillRef>
-          <a:effectRef idx="2">
-            <a:schemeClr val="accent1"/>
-          </a:effectRef>
-          <a:fontRef idx="minor">
-            <a:schemeClr val="lt1"/>
-          </a:fontRef>
-        </p:style>
-        <p:txBody>
-          <a:bodyPr rtlCol="0" anchor="ctr"/>
-          <a:lstStyle/>
-          <a:p>
-            <a:pPr algn="ctr"/>
-          </a:p>
-        </p:txBody>
-      </p:sp>
-      <p:sp>
-        <p:nvSpPr>
-          <p:cNvPr id="6" name="TextBox 5"/>
+          <p:cNvPr id="8" name="TextBox 7"/>
           <p:cNvSpPr txBox="1"/>
           <p:nvPr/>
         </p:nvSpPr>
         <p:spPr>
           <a:xfrm>
-            <a:off x="914400" y="1554480"/>
-            <a:ext cx="10362895" cy="5120640"/>
+            <a:off x="1051560" y="2286000"/>
+            <a:ext cx="10180015" cy="3840480"/>
           </a:xfrm>
           <a:prstGeom prst="rect">
             <a:avLst/>
@@ -7519,40 +7897,197 @@
           <a:p>
             <a:pPr algn="l">
               <a:lnSpc>
-                <a:spcPct val="110000"/>
+                <a:spcPct val="130000"/>
               </a:lnSpc>
               <a:spcAft>
-                <a:spcPts val="100"/>
+                <a:spcPts val="500"/>
               </a:spcAft>
             </a:pPr>
             <a:r>
-              <a:rPr sz="1300" b="0">
+              <a:rPr sz="1400" b="0">
                 <a:solidFill>
                   <a:srgbClr val="1C2A33"/>
                 </a:solidFill>
-                <a:latin typeface="微软雅黑"/>
-                <a:ea typeface="微软雅黑"/>
-                <a:cs typeface="微软雅黑"/>
+                <a:latin typeface="楷体"/>
+                <a:ea typeface="楷体"/>
+                <a:cs typeface="楷体"/>
               </a:rPr>
-              <a:t>┌── 林教头·施 ──┐
-│ 忍→反 │
-│ │
-│ 性格曲线: │
-│ 忍(发配) │
-│ 疑(买刀) │
-│ 反(山神庙) │
-│ │
-│ 风雪=推力+象征 │
-│ 细节:火盆/尖刀 │
-│ 主题:官逼民反 │
-└────────────────┘</a:t>
-            </a:r>
-          </a:p>
-        </p:txBody>
-      </p:sp>
-      <p:sp>
-        <p:nvSpPr>
-          <p:cNvPr id="7" name="TextBox 6"/>
+              <a:t>林教头·施</a:t>
+            </a:r>
+          </a:p>
+          <a:p>
+            <a:pPr algn="l">
+              <a:lnSpc>
+                <a:spcPct val="130000"/>
+              </a:lnSpc>
+              <a:spcAft>
+                <a:spcPts val="500"/>
+              </a:spcAft>
+            </a:pPr>
+            <a:r>
+              <a:rPr sz="1400" b="0">
+                <a:solidFill>
+                  <a:srgbClr val="6B6258"/>
+                </a:solidFill>
+                <a:latin typeface="楷体"/>
+                <a:ea typeface="楷体"/>
+                <a:cs typeface="楷体"/>
+              </a:rPr>
+              <a:t>忍→反</a:t>
+            </a:r>
+          </a:p>
+          <a:p>
+            <a:pPr algn="l">
+              <a:lnSpc>
+                <a:spcPct val="130000"/>
+              </a:lnSpc>
+              <a:spcAft>
+                <a:spcPts val="500"/>
+              </a:spcAft>
+            </a:pPr>
+            <a:r>
+              <a:rPr sz="1400" b="0">
+                <a:solidFill>
+                  <a:srgbClr val="1C2A33"/>
+                </a:solidFill>
+                <a:latin typeface="楷体"/>
+                <a:ea typeface="楷体"/>
+                <a:cs typeface="楷体"/>
+              </a:rPr>
+              <a:t>性格曲线:</a:t>
+            </a:r>
+          </a:p>
+          <a:p>
+            <a:pPr algn="l">
+              <a:lnSpc>
+                <a:spcPct val="130000"/>
+              </a:lnSpc>
+              <a:spcAft>
+                <a:spcPts val="500"/>
+              </a:spcAft>
+            </a:pPr>
+            <a:r>
+              <a:rPr sz="1400" b="0">
+                <a:solidFill>
+                  <a:srgbClr val="6B6258"/>
+                </a:solidFill>
+                <a:latin typeface="楷体"/>
+                <a:ea typeface="楷体"/>
+                <a:cs typeface="楷体"/>
+              </a:rPr>
+              <a:t>忍(发配)</a:t>
+            </a:r>
+          </a:p>
+          <a:p>
+            <a:pPr algn="l">
+              <a:lnSpc>
+                <a:spcPct val="130000"/>
+              </a:lnSpc>
+              <a:spcAft>
+                <a:spcPts val="500"/>
+              </a:spcAft>
+            </a:pPr>
+            <a:r>
+              <a:rPr sz="1400" b="0">
+                <a:solidFill>
+                  <a:srgbClr val="1C2A33"/>
+                </a:solidFill>
+                <a:latin typeface="楷体"/>
+                <a:ea typeface="楷体"/>
+                <a:cs typeface="楷体"/>
+              </a:rPr>
+              <a:t>疑(买刀)</a:t>
+            </a:r>
+          </a:p>
+          <a:p>
+            <a:pPr algn="l">
+              <a:lnSpc>
+                <a:spcPct val="130000"/>
+              </a:lnSpc>
+              <a:spcAft>
+                <a:spcPts val="500"/>
+              </a:spcAft>
+            </a:pPr>
+            <a:r>
+              <a:rPr sz="1400" b="0">
+                <a:solidFill>
+                  <a:srgbClr val="6B6258"/>
+                </a:solidFill>
+                <a:latin typeface="楷体"/>
+                <a:ea typeface="楷体"/>
+                <a:cs typeface="楷体"/>
+              </a:rPr>
+              <a:t>反(山神庙)</a:t>
+            </a:r>
+          </a:p>
+          <a:p>
+            <a:pPr algn="l">
+              <a:lnSpc>
+                <a:spcPct val="130000"/>
+              </a:lnSpc>
+              <a:spcAft>
+                <a:spcPts val="500"/>
+              </a:spcAft>
+            </a:pPr>
+            <a:r>
+              <a:rPr sz="1400" b="0">
+                <a:solidFill>
+                  <a:srgbClr val="1C2A33"/>
+                </a:solidFill>
+                <a:latin typeface="楷体"/>
+                <a:ea typeface="楷体"/>
+                <a:cs typeface="楷体"/>
+              </a:rPr>
+              <a:t>风雪=推力+象征</a:t>
+            </a:r>
+          </a:p>
+          <a:p>
+            <a:pPr algn="l">
+              <a:lnSpc>
+                <a:spcPct val="130000"/>
+              </a:lnSpc>
+              <a:spcAft>
+                <a:spcPts val="500"/>
+              </a:spcAft>
+            </a:pPr>
+            <a:r>
+              <a:rPr sz="1400" b="0">
+                <a:solidFill>
+                  <a:srgbClr val="6B6258"/>
+                </a:solidFill>
+                <a:latin typeface="楷体"/>
+                <a:ea typeface="楷体"/>
+                <a:cs typeface="楷体"/>
+              </a:rPr>
+              <a:t>细节:火盆/尖刀</a:t>
+            </a:r>
+          </a:p>
+          <a:p>
+            <a:pPr algn="l">
+              <a:lnSpc>
+                <a:spcPct val="130000"/>
+              </a:lnSpc>
+              <a:spcAft>
+                <a:spcPts val="500"/>
+              </a:spcAft>
+            </a:pPr>
+            <a:r>
+              <a:rPr sz="1400" b="0">
+                <a:solidFill>
+                  <a:srgbClr val="1C2A33"/>
+                </a:solidFill>
+                <a:latin typeface="楷体"/>
+                <a:ea typeface="楷体"/>
+                <a:cs typeface="楷体"/>
+              </a:rPr>
+              <a:t>主题:官逼民反</a:t>
+            </a:r>
+          </a:p>
+        </p:txBody>
+      </p:sp>
+      <p:sp>
+        <p:nvSpPr>
+          <p:cNvPr id="9" name="TextBox 8"/>
           <p:cNvSpPr txBox="1"/>
           <p:nvPr/>
         </p:nvSpPr>
@@ -7679,13 +8214,13 @@
             <a:r>
               <a:rPr sz="1300" b="1">
                 <a:solidFill>
-                  <a:srgbClr val="2E7D6B"/>
+                  <a:srgbClr val="B23A2A"/>
                 </a:solidFill>
                 <a:latin typeface="微软雅黑"/>
                 <a:ea typeface="微软雅黑"/>
                 <a:cs typeface="微软雅黑"/>
               </a:rPr>
-              <a:t>分层作业</a:t>
+              <a:t>作业</a:t>
             </a:r>
           </a:p>
         </p:txBody>
@@ -7700,6 +8235,325 @@
           <a:xfrm>
             <a:off x="640080" y="1097280"/>
             <a:ext cx="822960" cy="30480"/>
+          </a:xfrm>
+          <a:prstGeom prst="rect">
+            <a:avLst/>
+          </a:prstGeom>
+          <a:solidFill>
+            <a:srgbClr val="B23A2A"/>
+          </a:solidFill>
+          <a:ln>
+            <a:noFill/>
+          </a:ln>
+          <a:effectLst/>
+        </p:spPr>
+        <p:style>
+          <a:lnRef idx="1">
+            <a:schemeClr val="accent1"/>
+          </a:lnRef>
+          <a:fillRef idx="3">
+            <a:schemeClr val="accent1"/>
+          </a:fillRef>
+          <a:effectRef idx="2">
+            <a:schemeClr val="accent1"/>
+          </a:effectRef>
+          <a:fontRef idx="minor">
+            <a:schemeClr val="lt1"/>
+          </a:fontRef>
+        </p:style>
+        <p:txBody>
+          <a:bodyPr rtlCol="0" anchor="ctr"/>
+          <a:lstStyle/>
+          <a:p>
+            <a:pPr algn="ctr"/>
+          </a:p>
+        </p:txBody>
+      </p:sp>
+      <p:sp>
+        <p:nvSpPr>
+          <p:cNvPr id="5" name="TextBox 4"/>
+          <p:cNvSpPr txBox="1"/>
+          <p:nvPr/>
+        </p:nvSpPr>
+        <p:spPr>
+          <a:xfrm>
+            <a:off x="640080" y="1325880"/>
+            <a:ext cx="10058400" cy="548640"/>
+          </a:xfrm>
+          <a:prstGeom prst="rect">
+            <a:avLst/>
+          </a:prstGeom>
+          <a:noFill/>
+        </p:spPr>
+        <p:txBody>
+          <a:bodyPr wrap="square" anchor="t" lIns="0" rIns="0" tIns="0" bIns="0">
+            <a:spAutoFit/>
+          </a:bodyPr>
+          <a:lstStyle/>
+          <a:p>
+            <a:pPr algn="l"/>
+            <a:r>
+              <a:rPr sz="2800" b="1">
+                <a:solidFill>
+                  <a:srgbClr val="1C2A33"/>
+                </a:solidFill>
+                <a:latin typeface="楷体"/>
+                <a:ea typeface="楷体"/>
+                <a:cs typeface="楷体"/>
+              </a:rPr>
+              <a:t>分层作业</a:t>
+            </a:r>
+          </a:p>
+        </p:txBody>
+      </p:sp>
+      <p:sp>
+        <p:nvSpPr>
+          <p:cNvPr id="6" name="Rounded Rectangle 5"/>
+          <p:cNvSpPr/>
+          <p:nvPr/>
+        </p:nvSpPr>
+        <p:spPr>
+          <a:xfrm>
+            <a:off x="640080" y="2194560"/>
+            <a:ext cx="5272887" cy="3931920"/>
+          </a:xfrm>
+          <a:prstGeom prst="roundRect">
+            <a:avLst/>
+          </a:prstGeom>
+          <a:solidFill>
+            <a:srgbClr val="FFFFFF"/>
+          </a:solidFill>
+          <a:ln w="20320">
+            <a:solidFill>
+              <a:srgbClr val="B23A2A"/>
+            </a:solidFill>
+          </a:ln>
+          <a:effectLst/>
+        </p:spPr>
+        <p:style>
+          <a:lnRef idx="1">
+            <a:schemeClr val="accent1"/>
+          </a:lnRef>
+          <a:fillRef idx="3">
+            <a:schemeClr val="accent1"/>
+          </a:fillRef>
+          <a:effectRef idx="2">
+            <a:schemeClr val="accent1"/>
+          </a:effectRef>
+          <a:fontRef idx="minor">
+            <a:schemeClr val="lt1"/>
+          </a:fontRef>
+        </p:style>
+        <p:txBody>
+          <a:bodyPr rtlCol="0" anchor="ctr"/>
+          <a:lstStyle/>
+          <a:p>
+            <a:pPr algn="ctr"/>
+          </a:p>
+        </p:txBody>
+      </p:sp>
+      <p:sp>
+        <p:nvSpPr>
+          <p:cNvPr id="7" name="Rectangle 6"/>
+          <p:cNvSpPr/>
+          <p:nvPr/>
+        </p:nvSpPr>
+        <p:spPr>
+          <a:xfrm>
+            <a:off x="640080" y="2194560"/>
+            <a:ext cx="5272887" cy="548640"/>
+          </a:xfrm>
+          <a:prstGeom prst="rect">
+            <a:avLst/>
+          </a:prstGeom>
+          <a:solidFill>
+            <a:srgbClr val="B23A2A"/>
+          </a:solidFill>
+          <a:ln>
+            <a:noFill/>
+          </a:ln>
+          <a:effectLst/>
+        </p:spPr>
+        <p:style>
+          <a:lnRef idx="1">
+            <a:schemeClr val="accent1"/>
+          </a:lnRef>
+          <a:fillRef idx="3">
+            <a:schemeClr val="accent1"/>
+          </a:fillRef>
+          <a:effectRef idx="2">
+            <a:schemeClr val="accent1"/>
+          </a:effectRef>
+          <a:fontRef idx="minor">
+            <a:schemeClr val="lt1"/>
+          </a:fontRef>
+        </p:style>
+        <p:txBody>
+          <a:bodyPr rtlCol="0" anchor="ctr"/>
+          <a:lstStyle/>
+          <a:p>
+            <a:pPr algn="ctr"/>
+          </a:p>
+        </p:txBody>
+      </p:sp>
+      <p:sp>
+        <p:nvSpPr>
+          <p:cNvPr id="8" name="TextBox 7"/>
+          <p:cNvSpPr txBox="1"/>
+          <p:nvPr/>
+        </p:nvSpPr>
+        <p:spPr>
+          <a:xfrm>
+            <a:off x="640080" y="2304288"/>
+            <a:ext cx="5272887" cy="365760"/>
+          </a:xfrm>
+          <a:prstGeom prst="rect">
+            <a:avLst/>
+          </a:prstGeom>
+          <a:noFill/>
+        </p:spPr>
+        <p:txBody>
+          <a:bodyPr wrap="square" anchor="t" lIns="0" rIns="0" tIns="0" bIns="0">
+            <a:spAutoFit/>
+          </a:bodyPr>
+          <a:lstStyle/>
+          <a:p>
+            <a:pPr algn="ctr"/>
+            <a:r>
+              <a:rPr sz="1600" b="1">
+                <a:solidFill>
+                  <a:srgbClr val="FFFFFF"/>
+                </a:solidFill>
+                <a:latin typeface="微软雅黑"/>
+                <a:ea typeface="微软雅黑"/>
+                <a:cs typeface="微软雅黑"/>
+              </a:rPr>
+              <a:t>基础 · 必做</a:t>
+            </a:r>
+          </a:p>
+        </p:txBody>
+      </p:sp>
+      <p:sp>
+        <p:nvSpPr>
+          <p:cNvPr id="9" name="TextBox 8"/>
+          <p:cNvSpPr txBox="1"/>
+          <p:nvPr/>
+        </p:nvSpPr>
+        <p:spPr>
+          <a:xfrm>
+            <a:off x="914400" y="2971800"/>
+            <a:ext cx="4724247" cy="3017520"/>
+          </a:xfrm>
+          <a:prstGeom prst="rect">
+            <a:avLst/>
+          </a:prstGeom>
+          <a:noFill/>
+        </p:spPr>
+        <p:txBody>
+          <a:bodyPr wrap="square" anchor="t" lIns="0" rIns="0" tIns="0" bIns="0">
+            <a:spAutoFit/>
+          </a:bodyPr>
+          <a:lstStyle/>
+          <a:p>
+            <a:pPr algn="l">
+              <a:lnSpc>
+                <a:spcPct val="150000"/>
+              </a:lnSpc>
+              <a:spcAft>
+                <a:spcPts val="600"/>
+              </a:spcAft>
+            </a:pPr>
+            <a:r>
+              <a:rPr sz="1350" b="0">
+                <a:solidFill>
+                  <a:srgbClr val="1C2A33"/>
+                </a:solidFill>
+                <a:latin typeface="楷体"/>
+                <a:ea typeface="楷体"/>
+                <a:cs typeface="楷体"/>
+              </a:rPr>
+              <a:t>· 1. 写出林冲性格转变的两个节点。</a:t>
+            </a:r>
+          </a:p>
+          <a:p>
+            <a:pPr algn="l">
+              <a:lnSpc>
+                <a:spcPct val="150000"/>
+              </a:lnSpc>
+              <a:spcAft>
+                <a:spcPts val="600"/>
+              </a:spcAft>
+            </a:pPr>
+            <a:r>
+              <a:rPr sz="1350" b="0">
+                <a:solidFill>
+                  <a:srgbClr val="1C2A33"/>
+                </a:solidFill>
+                <a:latin typeface="楷体"/>
+                <a:ea typeface="楷体"/>
+                <a:cs typeface="楷体"/>
+              </a:rPr>
+              <a:t>· 2. 说风雪环境对情节的一处作用。</a:t>
+            </a:r>
+          </a:p>
+        </p:txBody>
+      </p:sp>
+      <p:sp>
+        <p:nvSpPr>
+          <p:cNvPr id="10" name="Rounded Rectangle 9"/>
+          <p:cNvSpPr/>
+          <p:nvPr/>
+        </p:nvSpPr>
+        <p:spPr>
+          <a:xfrm>
+            <a:off x="6278727" y="2194560"/>
+            <a:ext cx="5272887" cy="3931920"/>
+          </a:xfrm>
+          <a:prstGeom prst="roundRect">
+            <a:avLst/>
+          </a:prstGeom>
+          <a:solidFill>
+            <a:srgbClr val="FFFFFF"/>
+          </a:solidFill>
+          <a:ln w="20320">
+            <a:solidFill>
+              <a:srgbClr val="2E7D6B"/>
+            </a:solidFill>
+          </a:ln>
+          <a:effectLst/>
+        </p:spPr>
+        <p:style>
+          <a:lnRef idx="1">
+            <a:schemeClr val="accent1"/>
+          </a:lnRef>
+          <a:fillRef idx="3">
+            <a:schemeClr val="accent1"/>
+          </a:fillRef>
+          <a:effectRef idx="2">
+            <a:schemeClr val="accent1"/>
+          </a:effectRef>
+          <a:fontRef idx="minor">
+            <a:schemeClr val="lt1"/>
+          </a:fontRef>
+        </p:style>
+        <p:txBody>
+          <a:bodyPr rtlCol="0" anchor="ctr"/>
+          <a:lstStyle/>
+          <a:p>
+            <a:pPr algn="ctr"/>
+          </a:p>
+        </p:txBody>
+      </p:sp>
+      <p:sp>
+        <p:nvSpPr>
+          <p:cNvPr id="11" name="Rectangle 10"/>
+          <p:cNvSpPr/>
+          <p:nvPr/>
+        </p:nvSpPr>
+        <p:spPr>
+          <a:xfrm>
+            <a:off x="6278727" y="2194560"/>
+            <a:ext cx="5272887" cy="548640"/>
           </a:xfrm>
           <a:prstGeom prst="rect">
             <a:avLst/>
@@ -7736,60 +8590,14 @@
       </p:sp>
       <p:sp>
         <p:nvSpPr>
-          <p:cNvPr id="5" name="Rounded Rectangle 4"/>
-          <p:cNvSpPr/>
-          <p:nvPr/>
-        </p:nvSpPr>
-        <p:spPr>
-          <a:xfrm>
-            <a:off x="640080" y="1417320"/>
-            <a:ext cx="10911535" cy="1417320"/>
-          </a:xfrm>
-          <a:prstGeom prst="roundRect">
-            <a:avLst/>
-          </a:prstGeom>
-          <a:solidFill>
-            <a:srgbClr val="FFFFFF"/>
-          </a:solidFill>
-          <a:ln w="22860">
-            <a:solidFill>
-              <a:srgbClr val="2E7D6B"/>
-            </a:solidFill>
-          </a:ln>
-          <a:effectLst/>
-        </p:spPr>
-        <p:style>
-          <a:lnRef idx="1">
-            <a:schemeClr val="accent1"/>
-          </a:lnRef>
-          <a:fillRef idx="3">
-            <a:schemeClr val="accent1"/>
-          </a:fillRef>
-          <a:effectRef idx="2">
-            <a:schemeClr val="accent1"/>
-          </a:effectRef>
-          <a:fontRef idx="minor">
-            <a:schemeClr val="lt1"/>
-          </a:fontRef>
-        </p:style>
-        <p:txBody>
-          <a:bodyPr rtlCol="0" anchor="ctr"/>
-          <a:lstStyle/>
-          <a:p>
-            <a:pPr algn="ctr"/>
-          </a:p>
-        </p:txBody>
-      </p:sp>
-      <p:sp>
-        <p:nvSpPr>
-          <p:cNvPr id="6" name="TextBox 5"/>
+          <p:cNvPr id="12" name="TextBox 11"/>
           <p:cNvSpPr txBox="1"/>
           <p:nvPr/>
         </p:nvSpPr>
         <p:spPr>
           <a:xfrm>
-            <a:off x="1371600" y="1527048"/>
-            <a:ext cx="9997135" cy="457200"/>
+            <a:off x="6278727" y="2304288"/>
+            <a:ext cx="5272887" cy="365760"/>
           </a:xfrm>
           <a:prstGeom prst="rect">
             <a:avLst/>
@@ -7802,35 +8610,31 @@
           </a:bodyPr>
           <a:lstStyle/>
           <a:p>
-            <a:pPr algn="l">
-              <a:lnSpc>
-                <a:spcPct val="110000"/>
-              </a:lnSpc>
-            </a:pPr>
+            <a:pPr algn="ctr"/>
             <a:r>
               <a:rPr sz="1600" b="1">
                 <a:solidFill>
-                  <a:srgbClr val="1C2A33"/>
+                  <a:srgbClr val="FFFFFF"/>
                 </a:solidFill>
                 <a:latin typeface="微软雅黑"/>
                 <a:ea typeface="微软雅黑"/>
                 <a:cs typeface="微软雅黑"/>
               </a:rPr>
-              <a:t/>
-            </a:r>
-          </a:p>
-        </p:txBody>
-      </p:sp>
-      <p:sp>
-        <p:nvSpPr>
-          <p:cNvPr id="7" name="TextBox 6"/>
+              <a:t>提高 · 选做</a:t>
+            </a:r>
+          </a:p>
+        </p:txBody>
+      </p:sp>
+      <p:sp>
+        <p:nvSpPr>
+          <p:cNvPr id="13" name="TextBox 12"/>
           <p:cNvSpPr txBox="1"/>
           <p:nvPr/>
         </p:nvSpPr>
         <p:spPr>
           <a:xfrm>
-            <a:off x="1371600" y="1965960"/>
-            <a:ext cx="9997135" cy="777240"/>
+            <a:off x="6553047" y="2971800"/>
+            <a:ext cx="4724247" cy="3017520"/>
           </a:xfrm>
           <a:prstGeom prst="rect">
             <a:avLst/>
@@ -7845,11 +8649,14 @@
           <a:p>
             <a:pPr algn="l">
               <a:lnSpc>
-                <a:spcPct val="128000"/>
+                <a:spcPct val="150000"/>
               </a:lnSpc>
+              <a:spcAft>
+                <a:spcPts val="600"/>
+              </a:spcAft>
             </a:pPr>
             <a:r>
-              <a:rPr sz="1400" b="0">
+              <a:rPr sz="1350" b="0">
                 <a:solidFill>
                   <a:srgbClr val="1C2A33"/>
                 </a:solidFill>
@@ -7857,142 +8664,14 @@
                 <a:ea typeface="楷体"/>
                 <a:cs typeface="楷体"/>
               </a:rPr>
-              <a:t>【基础作业】1. 写出林冲性格转变的两个节点。2. 说风雪环境对情节的一处作用。</a:t>
-            </a:r>
-          </a:p>
-        </p:txBody>
-      </p:sp>
-      <p:sp>
-        <p:nvSpPr>
-          <p:cNvPr id="8" name="Rounded Rectangle 7"/>
-          <p:cNvSpPr/>
-          <p:nvPr/>
-        </p:nvSpPr>
-        <p:spPr>
-          <a:xfrm>
-            <a:off x="640080" y="2971800"/>
-            <a:ext cx="10911535" cy="1417320"/>
-          </a:xfrm>
-          <a:prstGeom prst="roundRect">
-            <a:avLst/>
-          </a:prstGeom>
-          <a:solidFill>
-            <a:srgbClr val="FFFFFF"/>
-          </a:solidFill>
-          <a:ln w="22860">
-            <a:solidFill>
-              <a:srgbClr val="2E7D6B"/>
-            </a:solidFill>
-          </a:ln>
-          <a:effectLst/>
-        </p:spPr>
-        <p:style>
-          <a:lnRef idx="1">
-            <a:schemeClr val="accent1"/>
-          </a:lnRef>
-          <a:fillRef idx="3">
-            <a:schemeClr val="accent1"/>
-          </a:fillRef>
-          <a:effectRef idx="2">
-            <a:schemeClr val="accent1"/>
-          </a:effectRef>
-          <a:fontRef idx="minor">
-            <a:schemeClr val="lt1"/>
-          </a:fontRef>
-        </p:style>
-        <p:txBody>
-          <a:bodyPr rtlCol="0" anchor="ctr"/>
-          <a:lstStyle/>
-          <a:p>
-            <a:pPr algn="ctr"/>
-          </a:p>
-        </p:txBody>
-      </p:sp>
-      <p:sp>
-        <p:nvSpPr>
-          <p:cNvPr id="9" name="TextBox 8"/>
-          <p:cNvSpPr txBox="1"/>
-          <p:nvPr/>
-        </p:nvSpPr>
-        <p:spPr>
-          <a:xfrm>
-            <a:off x="1371600" y="3081528"/>
-            <a:ext cx="9997135" cy="457200"/>
-          </a:xfrm>
-          <a:prstGeom prst="rect">
-            <a:avLst/>
-          </a:prstGeom>
-          <a:noFill/>
-        </p:spPr>
-        <p:txBody>
-          <a:bodyPr wrap="square" anchor="t" lIns="0" rIns="0" tIns="0" bIns="0">
-            <a:spAutoFit/>
-          </a:bodyPr>
-          <a:lstStyle/>
-          <a:p>
-            <a:pPr algn="l">
-              <a:lnSpc>
-                <a:spcPct val="110000"/>
-              </a:lnSpc>
-            </a:pPr>
-            <a:r>
-              <a:rPr sz="1600" b="1">
-                <a:solidFill>
-                  <a:srgbClr val="1C2A33"/>
-                </a:solidFill>
-                <a:latin typeface="微软雅黑"/>
-                <a:ea typeface="微软雅黑"/>
-                <a:cs typeface="微软雅黑"/>
-              </a:rPr>
-              <a:t/>
-            </a:r>
-          </a:p>
-        </p:txBody>
-      </p:sp>
-      <p:sp>
-        <p:nvSpPr>
-          <p:cNvPr id="10" name="TextBox 9"/>
-          <p:cNvSpPr txBox="1"/>
-          <p:nvPr/>
-        </p:nvSpPr>
-        <p:spPr>
-          <a:xfrm>
-            <a:off x="1371600" y="3520440"/>
-            <a:ext cx="9997135" cy="777240"/>
-          </a:xfrm>
-          <a:prstGeom prst="rect">
-            <a:avLst/>
-          </a:prstGeom>
-          <a:noFill/>
-        </p:spPr>
-        <p:txBody>
-          <a:bodyPr wrap="square" anchor="t" lIns="0" rIns="0" tIns="0" bIns="0">
-            <a:spAutoFit/>
-          </a:bodyPr>
-          <a:lstStyle/>
-          <a:p>
-            <a:pPr algn="l">
-              <a:lnSpc>
-                <a:spcPct val="128000"/>
-              </a:lnSpc>
-            </a:pPr>
-            <a:r>
-              <a:rPr sz="1200" b="0">
-                <a:solidFill>
-                  <a:srgbClr val="1C2A33"/>
-                </a:solidFill>
-                <a:latin typeface="楷体"/>
-                <a:ea typeface="楷体"/>
-                <a:cs typeface="楷体"/>
-              </a:rPr>
-              <a:t>【提高作业】写150字「我眼中的林冲」，要求：①联转变一处；②说风雪作用；③不脸谱化。</a:t>
-            </a:r>
-          </a:p>
-        </p:txBody>
-      </p:sp>
-      <p:sp>
-        <p:nvSpPr>
-          <p:cNvPr id="11" name="TextBox 10"/>
+              <a:t>· 写150字「我眼中的林冲」，要求：①联转变一处；②说风雪作用；③不脸谱化。</a:t>
+            </a:r>
+          </a:p>
+        </p:txBody>
+      </p:sp>
+      <p:sp>
+        <p:nvSpPr>
+          <p:cNvPr id="14" name="TextBox 13"/>
           <p:cNvSpPr txBox="1"/>
           <p:nvPr/>
         </p:nvSpPr>
@@ -8119,13 +8798,13 @@
             <a:r>
               <a:rPr sz="1300" b="1">
                 <a:solidFill>
-                  <a:srgbClr val="C8A86B"/>
+                  <a:srgbClr val="B23A2A"/>
                 </a:solidFill>
                 <a:latin typeface="微软雅黑"/>
                 <a:ea typeface="微软雅黑"/>
                 <a:cs typeface="微软雅黑"/>
               </a:rPr>
-              <a:t>本课小结</a:t>
+              <a:t>单元小结</a:t>
             </a:r>
           </a:p>
         </p:txBody>
@@ -8142,6 +8821,551 @@
             <a:ext cx="822960" cy="30480"/>
           </a:xfrm>
           <a:prstGeom prst="rect">
+            <a:avLst/>
+          </a:prstGeom>
+          <a:solidFill>
+            <a:srgbClr val="B23A2A"/>
+          </a:solidFill>
+          <a:ln>
+            <a:noFill/>
+          </a:ln>
+          <a:effectLst/>
+        </p:spPr>
+        <p:style>
+          <a:lnRef idx="1">
+            <a:schemeClr val="accent1"/>
+          </a:lnRef>
+          <a:fillRef idx="3">
+            <a:schemeClr val="accent1"/>
+          </a:fillRef>
+          <a:effectRef idx="2">
+            <a:schemeClr val="accent1"/>
+          </a:effectRef>
+          <a:fontRef idx="minor">
+            <a:schemeClr val="lt1"/>
+          </a:fontRef>
+        </p:style>
+        <p:txBody>
+          <a:bodyPr rtlCol="0" anchor="ctr"/>
+          <a:lstStyle/>
+          <a:p>
+            <a:pPr algn="ctr"/>
+          </a:p>
+        </p:txBody>
+      </p:sp>
+      <p:sp>
+        <p:nvSpPr>
+          <p:cNvPr id="5" name="TextBox 4"/>
+          <p:cNvSpPr txBox="1"/>
+          <p:nvPr/>
+        </p:nvSpPr>
+        <p:spPr>
+          <a:xfrm>
+            <a:off x="640080" y="1371600"/>
+            <a:ext cx="10972800" cy="822960"/>
+          </a:xfrm>
+          <a:prstGeom prst="rect">
+            <a:avLst/>
+          </a:prstGeom>
+          <a:noFill/>
+        </p:spPr>
+        <p:txBody>
+          <a:bodyPr wrap="square" anchor="t" lIns="0" rIns="0" tIns="0" bIns="0">
+            <a:spAutoFit/>
+          </a:bodyPr>
+          <a:lstStyle/>
+          <a:p>
+            <a:pPr algn="l"/>
+            <a:r>
+              <a:rPr sz="3000" b="1">
+                <a:solidFill>
+                  <a:srgbClr val="1C2A33"/>
+                </a:solidFill>
+                <a:latin typeface="楷体"/>
+                <a:ea typeface="楷体"/>
+                <a:cs typeface="楷体"/>
+              </a:rPr>
+              <a:t>回望《文学阅读与写作（小说）》</a:t>
+            </a:r>
+          </a:p>
+        </p:txBody>
+      </p:sp>
+      <p:sp>
+        <p:nvSpPr>
+          <p:cNvPr id="6" name="Rounded Rectangle 5"/>
+          <p:cNvSpPr/>
+          <p:nvPr/>
+        </p:nvSpPr>
+        <p:spPr>
+          <a:xfrm>
+            <a:off x="640080" y="1828800"/>
+            <a:ext cx="10911535" cy="1371600"/>
+          </a:xfrm>
+          <a:prstGeom prst="roundRect">
+            <a:avLst/>
+          </a:prstGeom>
+          <a:solidFill>
+            <a:srgbClr val="1C2A33"/>
+          </a:solidFill>
+          <a:effectLst/>
+        </p:spPr>
+        <p:style>
+          <a:lnRef idx="1">
+            <a:schemeClr val="accent1"/>
+          </a:lnRef>
+          <a:fillRef idx="3">
+            <a:schemeClr val="accent1"/>
+          </a:fillRef>
+          <a:effectRef idx="2">
+            <a:schemeClr val="accent1"/>
+          </a:effectRef>
+          <a:fontRef idx="minor">
+            <a:schemeClr val="lt1"/>
+          </a:fontRef>
+        </p:style>
+        <p:txBody>
+          <a:bodyPr rtlCol="0" anchor="ctr"/>
+          <a:lstStyle/>
+          <a:p>
+            <a:pPr algn="ctr"/>
+          </a:p>
+        </p:txBody>
+      </p:sp>
+      <p:sp>
+        <p:nvSpPr>
+          <p:cNvPr id="7" name="TextBox 6"/>
+          <p:cNvSpPr txBox="1"/>
+          <p:nvPr/>
+        </p:nvSpPr>
+        <p:spPr>
+          <a:xfrm>
+            <a:off x="1005840" y="1965960"/>
+            <a:ext cx="10180015" cy="1097280"/>
+          </a:xfrm>
+          <a:prstGeom prst="rect">
+            <a:avLst/>
+          </a:prstGeom>
+          <a:noFill/>
+        </p:spPr>
+        <p:txBody>
+          <a:bodyPr wrap="square" anchor="t" lIns="0" rIns="0" tIns="0" bIns="0">
+            <a:spAutoFit/>
+          </a:bodyPr>
+          <a:lstStyle/>
+          <a:p>
+            <a:pPr algn="ctr">
+              <a:lnSpc>
+                <a:spcPct val="145000"/>
+              </a:lnSpc>
+            </a:pPr>
+            <a:r>
+              <a:rPr sz="1500" b="0">
+                <a:solidFill>
+                  <a:srgbClr val="FFFFFF"/>
+                </a:solidFill>
+                <a:latin typeface="楷体"/>
+                <a:ea typeface="楷体"/>
+                <a:cs typeface="楷体"/>
+              </a:rPr>
+              <a:t>林冲之反不在天性，是被逼；风雪既是天气，也是压顶的世道。</a:t>
+            </a:r>
+          </a:p>
+        </p:txBody>
+      </p:sp>
+      <p:sp>
+        <p:nvSpPr>
+          <p:cNvPr id="8" name="Rounded Rectangle 7"/>
+          <p:cNvSpPr/>
+          <p:nvPr/>
+        </p:nvSpPr>
+        <p:spPr>
+          <a:xfrm>
+            <a:off x="640080" y="3474720"/>
+            <a:ext cx="10911535" cy="841248"/>
+          </a:xfrm>
+          <a:prstGeom prst="roundRect">
+            <a:avLst/>
+          </a:prstGeom>
+          <a:solidFill>
+            <a:srgbClr val="FFFFFF"/>
+          </a:solidFill>
+          <a:ln w="17780">
+            <a:solidFill>
+              <a:srgbClr val="B23A2A"/>
+            </a:solidFill>
+          </a:ln>
+          <a:effectLst/>
+        </p:spPr>
+        <p:style>
+          <a:lnRef idx="1">
+            <a:schemeClr val="accent1"/>
+          </a:lnRef>
+          <a:fillRef idx="3">
+            <a:schemeClr val="accent1"/>
+          </a:fillRef>
+          <a:effectRef idx="2">
+            <a:schemeClr val="accent1"/>
+          </a:effectRef>
+          <a:fontRef idx="minor">
+            <a:schemeClr val="lt1"/>
+          </a:fontRef>
+        </p:style>
+        <p:txBody>
+          <a:bodyPr rtlCol="0" anchor="ctr"/>
+          <a:lstStyle/>
+          <a:p>
+            <a:pPr algn="ctr"/>
+          </a:p>
+        </p:txBody>
+      </p:sp>
+      <p:sp>
+        <p:nvSpPr>
+          <p:cNvPr id="9" name="Oval 8"/>
+          <p:cNvSpPr/>
+          <p:nvPr/>
+        </p:nvSpPr>
+        <p:spPr>
+          <a:xfrm>
+            <a:off x="841248" y="3666744"/>
+            <a:ext cx="457200" cy="457200"/>
+          </a:xfrm>
+          <a:prstGeom prst="ellipse">
+            <a:avLst/>
+          </a:prstGeom>
+          <a:solidFill>
+            <a:srgbClr val="B23A2A"/>
+          </a:solidFill>
+          <a:ln>
+            <a:noFill/>
+          </a:ln>
+          <a:effectLst/>
+        </p:spPr>
+        <p:style>
+          <a:lnRef idx="1">
+            <a:schemeClr val="accent1"/>
+          </a:lnRef>
+          <a:fillRef idx="3">
+            <a:schemeClr val="accent1"/>
+          </a:fillRef>
+          <a:effectRef idx="2">
+            <a:schemeClr val="accent1"/>
+          </a:effectRef>
+          <a:fontRef idx="minor">
+            <a:schemeClr val="lt1"/>
+          </a:fontRef>
+        </p:style>
+        <p:txBody>
+          <a:bodyPr rtlCol="0" anchor="ctr"/>
+          <a:lstStyle/>
+          <a:p>
+            <a:pPr algn="ctr"/>
+          </a:p>
+        </p:txBody>
+      </p:sp>
+      <p:sp>
+        <p:nvSpPr>
+          <p:cNvPr id="10" name="TextBox 9"/>
+          <p:cNvSpPr txBox="1"/>
+          <p:nvPr/>
+        </p:nvSpPr>
+        <p:spPr>
+          <a:xfrm>
+            <a:off x="841248" y="3721608"/>
+            <a:ext cx="457200" cy="365760"/>
+          </a:xfrm>
+          <a:prstGeom prst="rect">
+            <a:avLst/>
+          </a:prstGeom>
+          <a:noFill/>
+        </p:spPr>
+        <p:txBody>
+          <a:bodyPr wrap="square" anchor="t" lIns="0" rIns="0" tIns="0" bIns="0">
+            <a:spAutoFit/>
+          </a:bodyPr>
+          <a:lstStyle/>
+          <a:p>
+            <a:pPr algn="ctr"/>
+            <a:r>
+              <a:rPr sz="1600" b="1">
+                <a:solidFill>
+                  <a:srgbClr val="FFFFFF"/>
+                </a:solidFill>
+                <a:latin typeface="微软雅黑"/>
+                <a:ea typeface="微软雅黑"/>
+                <a:cs typeface="微软雅黑"/>
+              </a:rPr>
+              <a:t>1</a:t>
+            </a:r>
+          </a:p>
+        </p:txBody>
+      </p:sp>
+      <p:sp>
+        <p:nvSpPr>
+          <p:cNvPr id="11" name="TextBox 10"/>
+          <p:cNvSpPr txBox="1"/>
+          <p:nvPr/>
+        </p:nvSpPr>
+        <p:spPr>
+          <a:xfrm>
+            <a:off x="1508760" y="3474720"/>
+            <a:ext cx="9905695" cy="841248"/>
+          </a:xfrm>
+          <a:prstGeom prst="rect">
+            <a:avLst/>
+          </a:prstGeom>
+          <a:noFill/>
+        </p:spPr>
+        <p:txBody>
+          <a:bodyPr wrap="square" anchor="ctr" lIns="0" rIns="0" tIns="0" bIns="0">
+            <a:spAutoFit/>
+          </a:bodyPr>
+          <a:lstStyle/>
+          <a:p>
+            <a:pPr algn="l">
+              <a:lnSpc>
+                <a:spcPct val="140000"/>
+              </a:lnSpc>
+            </a:pPr>
+            <a:r>
+              <a:rPr sz="1400" b="0">
+                <a:solidFill>
+                  <a:srgbClr val="1C2A33"/>
+                </a:solidFill>
+                <a:latin typeface="楷体"/>
+                <a:ea typeface="楷体"/>
+                <a:cs typeface="楷体"/>
+              </a:rPr>
+              <a:t>林冲性格里，哪一步转折最关键？写一句。</a:t>
+            </a:r>
+          </a:p>
+        </p:txBody>
+      </p:sp>
+      <p:sp>
+        <p:nvSpPr>
+          <p:cNvPr id="12" name="Rounded Rectangle 11"/>
+          <p:cNvSpPr/>
+          <p:nvPr/>
+        </p:nvSpPr>
+        <p:spPr>
+          <a:xfrm>
+            <a:off x="640080" y="4434840"/>
+            <a:ext cx="10911535" cy="841248"/>
+          </a:xfrm>
+          <a:prstGeom prst="roundRect">
+            <a:avLst/>
+          </a:prstGeom>
+          <a:solidFill>
+            <a:srgbClr val="FFFFFF"/>
+          </a:solidFill>
+          <a:ln w="17780">
+            <a:solidFill>
+              <a:srgbClr val="2E7D6B"/>
+            </a:solidFill>
+          </a:ln>
+          <a:effectLst/>
+        </p:spPr>
+        <p:style>
+          <a:lnRef idx="1">
+            <a:schemeClr val="accent1"/>
+          </a:lnRef>
+          <a:fillRef idx="3">
+            <a:schemeClr val="accent1"/>
+          </a:fillRef>
+          <a:effectRef idx="2">
+            <a:schemeClr val="accent1"/>
+          </a:effectRef>
+          <a:fontRef idx="minor">
+            <a:schemeClr val="lt1"/>
+          </a:fontRef>
+        </p:style>
+        <p:txBody>
+          <a:bodyPr rtlCol="0" anchor="ctr"/>
+          <a:lstStyle/>
+          <a:p>
+            <a:pPr algn="ctr"/>
+          </a:p>
+        </p:txBody>
+      </p:sp>
+      <p:sp>
+        <p:nvSpPr>
+          <p:cNvPr id="13" name="Oval 12"/>
+          <p:cNvSpPr/>
+          <p:nvPr/>
+        </p:nvSpPr>
+        <p:spPr>
+          <a:xfrm>
+            <a:off x="841248" y="4626864"/>
+            <a:ext cx="457200" cy="457200"/>
+          </a:xfrm>
+          <a:prstGeom prst="ellipse">
+            <a:avLst/>
+          </a:prstGeom>
+          <a:solidFill>
+            <a:srgbClr val="2E7D6B"/>
+          </a:solidFill>
+          <a:ln>
+            <a:noFill/>
+          </a:ln>
+          <a:effectLst/>
+        </p:spPr>
+        <p:style>
+          <a:lnRef idx="1">
+            <a:schemeClr val="accent1"/>
+          </a:lnRef>
+          <a:fillRef idx="3">
+            <a:schemeClr val="accent1"/>
+          </a:fillRef>
+          <a:effectRef idx="2">
+            <a:schemeClr val="accent1"/>
+          </a:effectRef>
+          <a:fontRef idx="minor">
+            <a:schemeClr val="lt1"/>
+          </a:fontRef>
+        </p:style>
+        <p:txBody>
+          <a:bodyPr rtlCol="0" anchor="ctr"/>
+          <a:lstStyle/>
+          <a:p>
+            <a:pPr algn="ctr"/>
+          </a:p>
+        </p:txBody>
+      </p:sp>
+      <p:sp>
+        <p:nvSpPr>
+          <p:cNvPr id="14" name="TextBox 13"/>
+          <p:cNvSpPr txBox="1"/>
+          <p:nvPr/>
+        </p:nvSpPr>
+        <p:spPr>
+          <a:xfrm>
+            <a:off x="841248" y="4681728"/>
+            <a:ext cx="457200" cy="365760"/>
+          </a:xfrm>
+          <a:prstGeom prst="rect">
+            <a:avLst/>
+          </a:prstGeom>
+          <a:noFill/>
+        </p:spPr>
+        <p:txBody>
+          <a:bodyPr wrap="square" anchor="t" lIns="0" rIns="0" tIns="0" bIns="0">
+            <a:spAutoFit/>
+          </a:bodyPr>
+          <a:lstStyle/>
+          <a:p>
+            <a:pPr algn="ctr"/>
+            <a:r>
+              <a:rPr sz="1600" b="1">
+                <a:solidFill>
+                  <a:srgbClr val="FFFFFF"/>
+                </a:solidFill>
+                <a:latin typeface="微软雅黑"/>
+                <a:ea typeface="微软雅黑"/>
+                <a:cs typeface="微软雅黑"/>
+              </a:rPr>
+              <a:t>2</a:t>
+            </a:r>
+          </a:p>
+        </p:txBody>
+      </p:sp>
+      <p:sp>
+        <p:nvSpPr>
+          <p:cNvPr id="15" name="TextBox 14"/>
+          <p:cNvSpPr txBox="1"/>
+          <p:nvPr/>
+        </p:nvSpPr>
+        <p:spPr>
+          <a:xfrm>
+            <a:off x="1508760" y="4434840"/>
+            <a:ext cx="9905695" cy="841248"/>
+          </a:xfrm>
+          <a:prstGeom prst="rect">
+            <a:avLst/>
+          </a:prstGeom>
+          <a:noFill/>
+        </p:spPr>
+        <p:txBody>
+          <a:bodyPr wrap="square" anchor="ctr" lIns="0" rIns="0" tIns="0" bIns="0">
+            <a:spAutoFit/>
+          </a:bodyPr>
+          <a:lstStyle/>
+          <a:p>
+            <a:pPr algn="l">
+              <a:lnSpc>
+                <a:spcPct val="140000"/>
+              </a:lnSpc>
+            </a:pPr>
+            <a:r>
+              <a:rPr sz="1400" b="0">
+                <a:solidFill>
+                  <a:srgbClr val="1C2A33"/>
+                </a:solidFill>
+                <a:latin typeface="楷体"/>
+                <a:ea typeface="楷体"/>
+                <a:cs typeface="楷体"/>
+              </a:rPr>
+              <a:t>用「忍 → 反」说说环境怎样推动转变。</a:t>
+            </a:r>
+          </a:p>
+        </p:txBody>
+      </p:sp>
+      <p:sp>
+        <p:nvSpPr>
+          <p:cNvPr id="16" name="Rounded Rectangle 15"/>
+          <p:cNvSpPr/>
+          <p:nvPr/>
+        </p:nvSpPr>
+        <p:spPr>
+          <a:xfrm>
+            <a:off x="640080" y="5394960"/>
+            <a:ext cx="10911535" cy="841248"/>
+          </a:xfrm>
+          <a:prstGeom prst="roundRect">
+            <a:avLst/>
+          </a:prstGeom>
+          <a:solidFill>
+            <a:srgbClr val="FFFFFF"/>
+          </a:solidFill>
+          <a:ln w="17780">
+            <a:solidFill>
+              <a:srgbClr val="C8A86B"/>
+            </a:solidFill>
+          </a:ln>
+          <a:effectLst/>
+        </p:spPr>
+        <p:style>
+          <a:lnRef idx="1">
+            <a:schemeClr val="accent1"/>
+          </a:lnRef>
+          <a:fillRef idx="3">
+            <a:schemeClr val="accent1"/>
+          </a:fillRef>
+          <a:effectRef idx="2">
+            <a:schemeClr val="accent1"/>
+          </a:effectRef>
+          <a:fontRef idx="minor">
+            <a:schemeClr val="lt1"/>
+          </a:fontRef>
+        </p:style>
+        <p:txBody>
+          <a:bodyPr rtlCol="0" anchor="ctr"/>
+          <a:lstStyle/>
+          <a:p>
+            <a:pPr algn="ctr"/>
+          </a:p>
+        </p:txBody>
+      </p:sp>
+      <p:sp>
+        <p:nvSpPr>
+          <p:cNvPr id="17" name="Oval 16"/>
+          <p:cNvSpPr/>
+          <p:nvPr/>
+        </p:nvSpPr>
+        <p:spPr>
+          <a:xfrm>
+            <a:off x="841248" y="5586984"/>
+            <a:ext cx="457200" cy="457200"/>
+          </a:xfrm>
+          <a:prstGeom prst="ellipse">
             <a:avLst/>
           </a:prstGeom>
           <a:solidFill>
@@ -8176,58 +9400,14 @@
       </p:sp>
       <p:sp>
         <p:nvSpPr>
-          <p:cNvPr id="5" name="Rectangle 4"/>
-          <p:cNvSpPr/>
-          <p:nvPr/>
-        </p:nvSpPr>
-        <p:spPr>
-          <a:xfrm>
-            <a:off x="640080" y="1737360"/>
-            <a:ext cx="54864" cy="431800"/>
-          </a:xfrm>
-          <a:prstGeom prst="rect">
-            <a:avLst/>
-          </a:prstGeom>
-          <a:solidFill>
-            <a:srgbClr val="C8A86B"/>
-          </a:solidFill>
-          <a:ln>
-            <a:noFill/>
-          </a:ln>
-          <a:effectLst/>
-        </p:spPr>
-        <p:style>
-          <a:lnRef idx="1">
-            <a:schemeClr val="accent1"/>
-          </a:lnRef>
-          <a:fillRef idx="3">
-            <a:schemeClr val="accent1"/>
-          </a:fillRef>
-          <a:effectRef idx="2">
-            <a:schemeClr val="accent1"/>
-          </a:effectRef>
-          <a:fontRef idx="minor">
-            <a:schemeClr val="lt1"/>
-          </a:fontRef>
-        </p:style>
-        <p:txBody>
-          <a:bodyPr rtlCol="0" anchor="ctr"/>
-          <a:lstStyle/>
-          <a:p>
-            <a:pPr algn="ctr"/>
-          </a:p>
-        </p:txBody>
-      </p:sp>
-      <p:sp>
-        <p:nvSpPr>
-          <p:cNvPr id="6" name="TextBox 5"/>
+          <p:cNvPr id="18" name="TextBox 17"/>
           <p:cNvSpPr txBox="1"/>
           <p:nvPr/>
         </p:nvSpPr>
         <p:spPr>
           <a:xfrm>
-            <a:off x="868680" y="1645920"/>
-            <a:ext cx="10682935" cy="2194560"/>
+            <a:off x="841248" y="5641848"/>
+            <a:ext cx="457200" cy="365760"/>
           </a:xfrm>
           <a:prstGeom prst="rect">
             <a:avLst/>
@@ -8240,16 +9420,50 @@
           </a:bodyPr>
           <a:lstStyle/>
           <a:p>
+            <a:pPr algn="ctr"/>
+            <a:r>
+              <a:rPr sz="1600" b="1">
+                <a:solidFill>
+                  <a:srgbClr val="FFFFFF"/>
+                </a:solidFill>
+                <a:latin typeface="微软雅黑"/>
+                <a:ea typeface="微软雅黑"/>
+                <a:cs typeface="微软雅黑"/>
+              </a:rPr>
+              <a:t>3</a:t>
+            </a:r>
+          </a:p>
+        </p:txBody>
+      </p:sp>
+      <p:sp>
+        <p:nvSpPr>
+          <p:cNvPr id="19" name="TextBox 18"/>
+          <p:cNvSpPr txBox="1"/>
+          <p:nvPr/>
+        </p:nvSpPr>
+        <p:spPr>
+          <a:xfrm>
+            <a:off x="1508760" y="5394960"/>
+            <a:ext cx="9905695" cy="841248"/>
+          </a:xfrm>
+          <a:prstGeom prst="rect">
+            <a:avLst/>
+          </a:prstGeom>
+          <a:noFill/>
+        </p:spPr>
+        <p:txBody>
+          <a:bodyPr wrap="square" anchor="ctr" lIns="0" rIns="0" tIns="0" bIns="0">
+            <a:spAutoFit/>
+          </a:bodyPr>
+          <a:lstStyle/>
+          <a:p>
             <a:pPr algn="l">
               <a:lnSpc>
-                <a:spcPct val="150000"/>
+                <a:spcPct val="140000"/>
               </a:lnSpc>
-              <a:spcAft>
-                <a:spcPts val="1000"/>
-              </a:spcAft>
             </a:pPr>
             <a:r>
-              <a:rPr sz="2200" b="0">
+              <a:rPr sz="1400" b="0">
                 <a:solidFill>
                   <a:srgbClr val="1C2A33"/>
                 </a:solidFill>
@@ -8257,28 +9471,14 @@
                 <a:ea typeface="楷体"/>
                 <a:cs typeface="楷体"/>
               </a:rPr>
-              <a:t>本单元主题：文学阅读与写作（小说）。把今天学到的方法带进下一篇——自己读、自己想、自己写。</a:t>
-            </a:r>
-          </a:p>
-          <a:p>
-            <a:pPr algn="l"/>
-            <a:r>
-              <a:rPr sz="1600" b="1">
-                <a:solidFill>
-                  <a:srgbClr val="B23A2A"/>
-                </a:solidFill>
-                <a:latin typeface="微软雅黑"/>
-                <a:ea typeface="微软雅黑"/>
-                <a:cs typeface="微软雅黑"/>
-              </a:rPr>
-              <a:t>方法迁移：圈关键信息 → 理事件脉络 → 析人物精神</a:t>
-            </a:r>
-          </a:p>
-        </p:txBody>
-      </p:sp>
-      <p:sp>
-        <p:nvSpPr>
-          <p:cNvPr id="7" name="TextBox 6"/>
+              <a:t>三个词概括你眼中的林冲。</a:t>
+            </a:r>
+          </a:p>
+        </p:txBody>
+      </p:sp>
+      <p:sp>
+        <p:nvSpPr>
+          <p:cNvPr id="20" name="TextBox 19"/>
           <p:cNvSpPr txBox="1"/>
           <p:nvPr/>
         </p:nvSpPr>
